--- a/Yukpo_Investisseur_Presentation_Finale.pptx
+++ b/Yukpo_Investisseur_Presentation_Finale.pptx
@@ -421,10 +421,6 @@
         <c:crosses val="autoZero"/>
       </c:valAx>
     </c:plotArea>
-    <c:legend>
-      <c:legendPos val="b"/>
-      <c:overlay val="0"/>
-    </c:legend>
     <c:dispBlanksAs val="gap"/>
   </c:chart>
   <c:txPr>
@@ -18619,6 +18615,237 @@
         </p:nvSpPr>
         <p:spPr>
           <a:xfrm>
+            <a:off x="180000" y="6120000"/>
+            <a:ext cx="198000" cy="162000"/>
+          </a:xfrm>
+          <a:prstGeom prst="rect">
+            <a:avLst/>
+          </a:prstGeom>
+          <a:solidFill>
+            <a:srgbClr val="D4AF37"/>
+          </a:solidFill>
+          <a:ln>
+            <a:noFill/>
+          </a:ln>
+        </p:spPr>
+        <p:style>
+          <a:lnRef idx="1">
+            <a:schemeClr val="accent1"/>
+          </a:lnRef>
+          <a:fillRef idx="3">
+            <a:schemeClr val="accent1"/>
+          </a:fillRef>
+          <a:effectRef idx="2">
+            <a:schemeClr val="accent1"/>
+          </a:effectRef>
+          <a:fontRef idx="minor">
+            <a:schemeClr val="lt1"/>
+          </a:fontRef>
+        </p:style>
+        <p:txBody>
+          <a:bodyPr rtlCol="0" anchor="ctr"/>
+          <a:lstStyle/>
+          <a:p>
+            <a:pPr algn="ctr"/>
+          </a:p>
+        </p:txBody>
+      </p:sp>
+      <p:sp>
+        <p:nvSpPr>
+          <p:cNvPr id="11" name="TextBox 10"/>
+          <p:cNvSpPr txBox="1"/>
+          <p:nvPr/>
+        </p:nvSpPr>
+        <p:spPr>
+          <a:xfrm>
+            <a:off x="414000" y="6120000"/>
+            <a:ext cx="2010000" cy="172800"/>
+          </a:xfrm>
+          <a:prstGeom prst="rect">
+            <a:avLst/>
+          </a:prstGeom>
+          <a:noFill/>
+        </p:spPr>
+        <p:txBody>
+          <a:bodyPr wrap="square">
+            <a:spAutoFit/>
+          </a:bodyPr>
+          <a:lstStyle/>
+          <a:p>
+            <a:pPr algn="l"/>
+            <a:r>
+              <a:rPr sz="1000" b="1" i="0">
+                <a:solidFill>
+                  <a:srgbClr val="FFFFFF"/>
+                </a:solidFill>
+              </a:rPr>
+              <a:t>Revenus (M FCFA)</a:t>
+            </a:r>
+          </a:p>
+        </p:txBody>
+      </p:sp>
+      <p:sp>
+        <p:nvSpPr>
+          <p:cNvPr id="12" name="Rectangle 11"/>
+          <p:cNvSpPr/>
+          <p:nvPr/>
+        </p:nvSpPr>
+        <p:spPr>
+          <a:xfrm>
+            <a:off x="2460000" y="6120000"/>
+            <a:ext cx="198000" cy="162000"/>
+          </a:xfrm>
+          <a:prstGeom prst="rect">
+            <a:avLst/>
+          </a:prstGeom>
+          <a:solidFill>
+            <a:srgbClr val="FF6B6B"/>
+          </a:solidFill>
+          <a:ln>
+            <a:noFill/>
+          </a:ln>
+        </p:spPr>
+        <p:style>
+          <a:lnRef idx="1">
+            <a:schemeClr val="accent1"/>
+          </a:lnRef>
+          <a:fillRef idx="3">
+            <a:schemeClr val="accent1"/>
+          </a:fillRef>
+          <a:effectRef idx="2">
+            <a:schemeClr val="accent1"/>
+          </a:effectRef>
+          <a:fontRef idx="minor">
+            <a:schemeClr val="lt1"/>
+          </a:fontRef>
+        </p:style>
+        <p:txBody>
+          <a:bodyPr rtlCol="0" anchor="ctr"/>
+          <a:lstStyle/>
+          <a:p>
+            <a:pPr algn="ctr"/>
+          </a:p>
+        </p:txBody>
+      </p:sp>
+      <p:sp>
+        <p:nvSpPr>
+          <p:cNvPr id="13" name="TextBox 12"/>
+          <p:cNvSpPr txBox="1"/>
+          <p:nvPr/>
+        </p:nvSpPr>
+        <p:spPr>
+          <a:xfrm>
+            <a:off x="2694000" y="6120000"/>
+            <a:ext cx="2010000" cy="172800"/>
+          </a:xfrm>
+          <a:prstGeom prst="rect">
+            <a:avLst/>
+          </a:prstGeom>
+          <a:noFill/>
+        </p:spPr>
+        <p:txBody>
+          <a:bodyPr wrap="square">
+            <a:spAutoFit/>
+          </a:bodyPr>
+          <a:lstStyle/>
+          <a:p>
+            <a:pPr algn="l"/>
+            <a:r>
+              <a:rPr sz="1000" b="1" i="0">
+                <a:solidFill>
+                  <a:srgbClr val="FFFFFF"/>
+                </a:solidFill>
+              </a:rPr>
+              <a:t>Charges (M FCFA)</a:t>
+            </a:r>
+          </a:p>
+        </p:txBody>
+      </p:sp>
+      <p:sp>
+        <p:nvSpPr>
+          <p:cNvPr id="14" name="Rectangle 13"/>
+          <p:cNvSpPr/>
+          <p:nvPr/>
+        </p:nvSpPr>
+        <p:spPr>
+          <a:xfrm>
+            <a:off x="4740000" y="6120000"/>
+            <a:ext cx="198000" cy="162000"/>
+          </a:xfrm>
+          <a:prstGeom prst="rect">
+            <a:avLst/>
+          </a:prstGeom>
+          <a:solidFill>
+            <a:srgbClr val="4FC3F7"/>
+          </a:solidFill>
+          <a:ln>
+            <a:noFill/>
+          </a:ln>
+        </p:spPr>
+        <p:style>
+          <a:lnRef idx="1">
+            <a:schemeClr val="accent1"/>
+          </a:lnRef>
+          <a:fillRef idx="3">
+            <a:schemeClr val="accent1"/>
+          </a:fillRef>
+          <a:effectRef idx="2">
+            <a:schemeClr val="accent1"/>
+          </a:effectRef>
+          <a:fontRef idx="minor">
+            <a:schemeClr val="lt1"/>
+          </a:fontRef>
+        </p:style>
+        <p:txBody>
+          <a:bodyPr rtlCol="0" anchor="ctr"/>
+          <a:lstStyle/>
+          <a:p>
+            <a:pPr algn="ctr"/>
+          </a:p>
+        </p:txBody>
+      </p:sp>
+      <p:sp>
+        <p:nvSpPr>
+          <p:cNvPr id="15" name="TextBox 14"/>
+          <p:cNvSpPr txBox="1"/>
+          <p:nvPr/>
+        </p:nvSpPr>
+        <p:spPr>
+          <a:xfrm>
+            <a:off x="4974000" y="6120000"/>
+            <a:ext cx="2010000" cy="172800"/>
+          </a:xfrm>
+          <a:prstGeom prst="rect">
+            <a:avLst/>
+          </a:prstGeom>
+          <a:noFill/>
+        </p:spPr>
+        <p:txBody>
+          <a:bodyPr wrap="square">
+            <a:spAutoFit/>
+          </a:bodyPr>
+          <a:lstStyle/>
+          <a:p>
+            <a:pPr algn="l"/>
+            <a:r>
+              <a:rPr sz="1000" b="1" i="0">
+                <a:solidFill>
+                  <a:srgbClr val="FFFFFF"/>
+                </a:solidFill>
+              </a:rPr>
+              <a:t>Trésorerie (M FCFA)</a:t>
+            </a:r>
+          </a:p>
+        </p:txBody>
+      </p:sp>
+      <p:sp>
+        <p:nvSpPr>
+          <p:cNvPr id="16" name="Rectangle 15"/>
+          <p:cNvSpPr/>
+          <p:nvPr/>
+        </p:nvSpPr>
+        <p:spPr>
+          <a:xfrm>
             <a:off x="7343999" y="1440000"/>
             <a:ext cx="1655999" cy="4788000"/>
           </a:xfrm>
@@ -18658,7 +18885,7 @@
       </p:sp>
       <p:sp>
         <p:nvSpPr>
-          <p:cNvPr id="11" name="Rectangle 10"/>
+          <p:cNvPr id="17" name="Rectangle 16"/>
           <p:cNvSpPr/>
           <p:nvPr/>
         </p:nvSpPr>
@@ -18701,7 +18928,7 @@
       </p:sp>
       <p:sp>
         <p:nvSpPr>
-          <p:cNvPr id="12" name="TextBox 11"/>
+          <p:cNvPr id="18" name="TextBox 17"/>
           <p:cNvSpPr txBox="1"/>
           <p:nvPr/>
         </p:nvSpPr>
@@ -18735,7 +18962,7 @@
       </p:sp>
       <p:sp>
         <p:nvSpPr>
-          <p:cNvPr id="13" name="TextBox 12"/>
+          <p:cNvPr id="19" name="TextBox 18"/>
           <p:cNvSpPr txBox="1"/>
           <p:nvPr/>
         </p:nvSpPr>
@@ -18770,7 +18997,7 @@
       </p:sp>
       <p:sp>
         <p:nvSpPr>
-          <p:cNvPr id="14" name="Rectangle 13"/>
+          <p:cNvPr id="20" name="Rectangle 19"/>
           <p:cNvSpPr/>
           <p:nvPr/>
         </p:nvSpPr>
@@ -18813,7 +19040,7 @@
       </p:sp>
       <p:sp>
         <p:nvSpPr>
-          <p:cNvPr id="15" name="TextBox 14"/>
+          <p:cNvPr id="21" name="TextBox 20"/>
           <p:cNvSpPr txBox="1"/>
           <p:nvPr/>
         </p:nvSpPr>
@@ -18847,7 +19074,7 @@
       </p:sp>
       <p:sp>
         <p:nvSpPr>
-          <p:cNvPr id="16" name="TextBox 15"/>
+          <p:cNvPr id="22" name="TextBox 21"/>
           <p:cNvSpPr txBox="1"/>
           <p:nvPr/>
         </p:nvSpPr>
@@ -18881,7 +19108,7 @@
       </p:sp>
       <p:sp>
         <p:nvSpPr>
-          <p:cNvPr id="17" name="Rectangle 16"/>
+          <p:cNvPr id="23" name="Rectangle 22"/>
           <p:cNvSpPr/>
           <p:nvPr/>
         </p:nvSpPr>
@@ -18924,7 +19151,7 @@
       </p:sp>
       <p:sp>
         <p:nvSpPr>
-          <p:cNvPr id="18" name="TextBox 17"/>
+          <p:cNvPr id="24" name="TextBox 23"/>
           <p:cNvSpPr txBox="1"/>
           <p:nvPr/>
         </p:nvSpPr>
@@ -18958,7 +19185,7 @@
       </p:sp>
       <p:sp>
         <p:nvSpPr>
-          <p:cNvPr id="19" name="TextBox 18"/>
+          <p:cNvPr id="25" name="TextBox 24"/>
           <p:cNvSpPr txBox="1"/>
           <p:nvPr/>
         </p:nvSpPr>
@@ -18992,7 +19219,7 @@
       </p:sp>
       <p:sp>
         <p:nvSpPr>
-          <p:cNvPr id="20" name="Rectangle 19"/>
+          <p:cNvPr id="26" name="Rectangle 25"/>
           <p:cNvSpPr/>
           <p:nvPr/>
         </p:nvSpPr>
@@ -19035,7 +19262,7 @@
       </p:sp>
       <p:sp>
         <p:nvSpPr>
-          <p:cNvPr id="21" name="TextBox 20"/>
+          <p:cNvPr id="27" name="TextBox 26"/>
           <p:cNvSpPr txBox="1"/>
           <p:nvPr/>
         </p:nvSpPr>
@@ -19069,7 +19296,7 @@
       </p:sp>
       <p:sp>
         <p:nvSpPr>
-          <p:cNvPr id="22" name="TextBox 21"/>
+          <p:cNvPr id="28" name="TextBox 27"/>
           <p:cNvSpPr txBox="1"/>
           <p:nvPr/>
         </p:nvSpPr>
@@ -19103,7 +19330,7 @@
       </p:sp>
       <p:sp>
         <p:nvSpPr>
-          <p:cNvPr id="23" name="Rectangle 22"/>
+          <p:cNvPr id="29" name="Rectangle 28"/>
           <p:cNvSpPr/>
           <p:nvPr/>
         </p:nvSpPr>
@@ -19146,7 +19373,7 @@
       </p:sp>
       <p:sp>
         <p:nvSpPr>
-          <p:cNvPr id="24" name="TextBox 23"/>
+          <p:cNvPr id="30" name="TextBox 29"/>
           <p:cNvSpPr txBox="1"/>
           <p:nvPr/>
         </p:nvSpPr>
@@ -19180,7 +19407,7 @@
       </p:sp>
       <p:sp>
         <p:nvSpPr>
-          <p:cNvPr id="25" name="TextBox 24"/>
+          <p:cNvPr id="31" name="TextBox 30"/>
           <p:cNvSpPr txBox="1"/>
           <p:nvPr/>
         </p:nvSpPr>
@@ -19214,7 +19441,7 @@
       </p:sp>
       <p:sp>
         <p:nvSpPr>
-          <p:cNvPr id="26" name="Rectangle 25"/>
+          <p:cNvPr id="32" name="Rectangle 31"/>
           <p:cNvSpPr/>
           <p:nvPr/>
         </p:nvSpPr>
@@ -19257,7 +19484,7 @@
       </p:sp>
       <p:sp>
         <p:nvSpPr>
-          <p:cNvPr id="27" name="TextBox 26"/>
+          <p:cNvPr id="33" name="TextBox 32"/>
           <p:cNvSpPr txBox="1"/>
           <p:nvPr/>
         </p:nvSpPr>
@@ -19291,7 +19518,7 @@
       </p:sp>
       <p:sp>
         <p:nvSpPr>
-          <p:cNvPr id="28" name="TextBox 27"/>
+          <p:cNvPr id="34" name="TextBox 33"/>
           <p:cNvSpPr txBox="1"/>
           <p:nvPr/>
         </p:nvSpPr>
@@ -19325,7 +19552,7 @@
       </p:sp>
       <p:sp>
         <p:nvSpPr>
-          <p:cNvPr id="29" name="Rectangle 28"/>
+          <p:cNvPr id="35" name="Rectangle 34"/>
           <p:cNvSpPr/>
           <p:nvPr/>
         </p:nvSpPr>
@@ -19368,7 +19595,7 @@
       </p:sp>
       <p:sp>
         <p:nvSpPr>
-          <p:cNvPr id="30" name="Rectangle 29"/>
+          <p:cNvPr id="36" name="Rectangle 35"/>
           <p:cNvSpPr/>
           <p:nvPr/>
         </p:nvSpPr>
@@ -19413,7 +19640,7 @@
       </p:sp>
       <p:sp>
         <p:nvSpPr>
-          <p:cNvPr id="31" name="TextBox 30"/>
+          <p:cNvPr id="37" name="TextBox 36"/>
           <p:cNvSpPr txBox="1"/>
           <p:nvPr/>
         </p:nvSpPr>
@@ -23695,10 +23922,10 @@
                   <a:srgbClr val="B0C4DE"/>
                 </a:solidFill>
               </a:rPr>
-              <a:t>La banque se porte caution
-pour YUKPO auprès
-de partenaires et
-fournisseurs stratégiques</a:t>
+              <a:t>L'investisseur apporte sa
+caution personnelle à une
+banque, qui octroie en
+retour un prêt à YUKPO.</a:t>
             </a:r>
           </a:p>
         </p:txBody>
@@ -23809,10 +24036,12 @@
                   <a:srgbClr val="B0C4DE"/>
                 </a:solidFill>
               </a:rPr>
-              <a:t>Déblocage de contrats
-commerciaux importants.
-Levier de crédibilité marché
-sans dilution du capital.</a:t>
+              <a:t>YUKPO accède au crédit
+sans diluer son capital.
+L'investisseur valorise
+sa relation bancaire.
+Risque limité si l'activité
+couvre les échéances.</a:t>
             </a:r>
           </a:p>
         </p:txBody>

--- a/Yukpo_Investisseur_Presentation_Finale.pptx
+++ b/Yukpo_Investisseur_Presentation_Finale.pptx
@@ -5,24 +5,24 @@
     <p:sldMasterId id="2147483648" r:id="rId1"/>
   </p:sldMasterIdLst>
   <p:sldIdLst>
-    <p:sldId id="256" r:id="rId7"/>
-    <p:sldId id="257" r:id="rId8"/>
-    <p:sldId id="258" r:id="rId9"/>
-    <p:sldId id="259" r:id="rId10"/>
-    <p:sldId id="260" r:id="rId11"/>
-    <p:sldId id="261" r:id="rId12"/>
-    <p:sldId id="262" r:id="rId13"/>
-    <p:sldId id="263" r:id="rId14"/>
-    <p:sldId id="264" r:id="rId15"/>
-    <p:sldId id="265" r:id="rId16"/>
-    <p:sldId id="266" r:id="rId17"/>
-    <p:sldId id="267" r:id="rId18"/>
-    <p:sldId id="268" r:id="rId19"/>
-    <p:sldId id="269" r:id="rId20"/>
-    <p:sldId id="270" r:id="rId21"/>
-    <p:sldId id="271" r:id="rId22"/>
-    <p:sldId id="272" r:id="rId23"/>
-    <p:sldId id="273" r:id="rId24"/>
+    <p:sldId id="256" r:id="rId2"/>
+    <p:sldId id="257" r:id="rId3"/>
+    <p:sldId id="258" r:id="rId4"/>
+    <p:sldId id="259" r:id="rId5"/>
+    <p:sldId id="260" r:id="rId6"/>
+    <p:sldId id="261" r:id="rId7"/>
+    <p:sldId id="262" r:id="rId8"/>
+    <p:sldId id="263" r:id="rId9"/>
+    <p:sldId id="264" r:id="rId10"/>
+    <p:sldId id="265" r:id="rId11"/>
+    <p:sldId id="266" r:id="rId12"/>
+    <p:sldId id="267" r:id="rId13"/>
+    <p:sldId id="268" r:id="rId14"/>
+    <p:sldId id="269" r:id="rId15"/>
+    <p:sldId id="270" r:id="rId16"/>
+    <p:sldId id="271" r:id="rId17"/>
+    <p:sldId id="272" r:id="rId18"/>
+    <p:sldId id="273" r:id="rId19"/>
   </p:sldIdLst>
   <p:sldSz cx="9144000" cy="6858000" type="screen4x3"/>
   <p:notesSz cx="6858000" cy="9144000"/>
@@ -121,18 +121,39 @@
       </a:defRPr>
     </a:lvl9pPr>
   </p:defaultTextStyle>
+  <p:extLst>
+    <p:ext uri="{EFAFB233-063F-42B5-8137-9DF3F51BA10A}">
+      <p15:sldGuideLst xmlns:p15="http://schemas.microsoft.com/office/powerpoint/2012/main">
+        <p15:guide id="1" orient="horz" pos="2160">
+          <p15:clr>
+            <a:srgbClr val="A4A3A4"/>
+          </p15:clr>
+        </p15:guide>
+        <p15:guide id="2" pos="2880">
+          <p15:clr>
+            <a:srgbClr val="A4A3A4"/>
+          </p15:clr>
+        </p15:guide>
+      </p15:sldGuideLst>
+    </p:ext>
+  </p:extLst>
 </p:presentation>
 </file>
 
 <file path=ppt/charts/chart1.xml><?xml version="1.0" encoding="utf-8"?>
-<c:chartSpace xmlns:c="http://schemas.openxmlformats.org/drawingml/2006/chart" xmlns:a="http://schemas.openxmlformats.org/drawingml/2006/main" xmlns:r="http://schemas.openxmlformats.org/officeDocument/2006/relationships">
+<c:chartSpace xmlns:c="http://schemas.openxmlformats.org/drawingml/2006/chart" xmlns:a="http://schemas.openxmlformats.org/drawingml/2006/main" xmlns:r="http://schemas.openxmlformats.org/officeDocument/2006/relationships" xmlns:c16r2="http://schemas.microsoft.com/office/drawing/2015/06/chart">
   <c:date1904 val="0"/>
+  <c:lang val="fr-FR"/>
+  <c:roundedCorners val="1"/>
+  <c:style val="2"/>
   <c:chart>
     <c:autoTitleDeleted val="0"/>
     <c:plotArea>
+      <c:layout/>
       <c:barChart>
         <c:barDir val="col"/>
         <c:grouping val="clustered"/>
+        <c:varyColors val="1"/>
         <c:ser>
           <c:idx val="0"/>
           <c:order val="0"/>
@@ -152,6 +173,7 @@
               <a:srgbClr val="D4AF37"/>
             </a:solidFill>
           </c:spPr>
+          <c:invertIfNegative val="1"/>
           <c:cat>
             <c:strRef>
               <c:f>Sheet1!$A$2:$A$9</c:f>
@@ -217,6 +239,20 @@
               </c:numCache>
             </c:numRef>
           </c:val>
+          <c:extLst>
+            <c:ext xmlns:c14="http://schemas.microsoft.com/office/drawing/2007/8/2/chart" uri="{6F2FDCE9-48DA-4B69-8628-5D25D57E5C99}">
+              <c14:invertSolidFillFmt>
+                <c14:spPr xmlns:c14="http://schemas.microsoft.com/office/drawing/2007/8/2/chart">
+                  <a:solidFill>
+                    <a:srgbClr val="FFFFFF"/>
+                  </a:solidFill>
+                </c14:spPr>
+              </c14:invertSolidFillFmt>
+            </c:ext>
+            <c:ext xmlns:c16="http://schemas.microsoft.com/office/drawing/2014/chart" uri="{C3380CC4-5D6E-409C-BE32-E72D297353CC}">
+              <c16:uniqueId val="{00000000-7171-4CF6-BF19-A28451D57CCD}"/>
+            </c:ext>
+          </c:extLst>
         </c:ser>
         <c:ser>
           <c:idx val="1"/>
@@ -237,6 +273,7 @@
               <a:srgbClr val="FF6B6B"/>
             </a:solidFill>
           </c:spPr>
+          <c:invertIfNegative val="1"/>
           <c:cat>
             <c:strRef>
               <c:f>Sheet1!$A$2:$A$9</c:f>
@@ -302,6 +339,20 @@
               </c:numCache>
             </c:numRef>
           </c:val>
+          <c:extLst>
+            <c:ext xmlns:c14="http://schemas.microsoft.com/office/drawing/2007/8/2/chart" uri="{6F2FDCE9-48DA-4B69-8628-5D25D57E5C99}">
+              <c14:invertSolidFillFmt>
+                <c14:spPr xmlns:c14="http://schemas.microsoft.com/office/drawing/2007/8/2/chart">
+                  <a:solidFill>
+                    <a:srgbClr val="FFFFFF"/>
+                  </a:solidFill>
+                </c14:spPr>
+              </c14:invertSolidFillFmt>
+            </c:ext>
+            <c:ext xmlns:c16="http://schemas.microsoft.com/office/drawing/2014/chart" uri="{C3380CC4-5D6E-409C-BE32-E72D297353CC}">
+              <c16:uniqueId val="{00000001-7171-4CF6-BF19-A28451D57CCD}"/>
+            </c:ext>
+          </c:extLst>
         </c:ser>
         <c:ser>
           <c:idx val="2"/>
@@ -322,6 +373,7 @@
               <a:srgbClr val="4FC3F7"/>
             </a:solidFill>
           </c:spPr>
+          <c:invertIfNegative val="1"/>
           <c:cat>
             <c:strRef>
               <c:f>Sheet1!$A$2:$A$9</c:f>
@@ -387,7 +439,30 @@
               </c:numCache>
             </c:numRef>
           </c:val>
+          <c:extLst>
+            <c:ext xmlns:c14="http://schemas.microsoft.com/office/drawing/2007/8/2/chart" uri="{6F2FDCE9-48DA-4B69-8628-5D25D57E5C99}">
+              <c14:invertSolidFillFmt>
+                <c14:spPr xmlns:c14="http://schemas.microsoft.com/office/drawing/2007/8/2/chart">
+                  <a:solidFill>
+                    <a:srgbClr val="FFFFFF"/>
+                  </a:solidFill>
+                </c14:spPr>
+              </c14:invertSolidFillFmt>
+            </c:ext>
+            <c:ext xmlns:c16="http://schemas.microsoft.com/office/drawing/2014/chart" uri="{C3380CC4-5D6E-409C-BE32-E72D297353CC}">
+              <c16:uniqueId val="{00000002-7171-4CF6-BF19-A28451D57CCD}"/>
+            </c:ext>
+          </c:extLst>
         </c:ser>
+        <c:dLbls>
+          <c:showLegendKey val="0"/>
+          <c:showVal val="0"/>
+          <c:showCatName val="0"/>
+          <c:showSerName val="0"/>
+          <c:showPercent val="0"/>
+          <c:showBubbleSize val="0"/>
+        </c:dLbls>
+        <c:gapWidth val="150"/>
         <c:axId val="-2068027336"/>
         <c:axId val="-2113994440"/>
       </c:barChart>
@@ -398,6 +473,7 @@
         </c:scaling>
         <c:delete val="0"/>
         <c:axPos val="b"/>
+        <c:numFmt formatCode="General" sourceLinked="0"/>
         <c:majorTickMark val="out"/>
         <c:minorTickMark val="none"/>
         <c:tickLblPos val="nextTo"/>
@@ -410,18 +486,24 @@
       </c:catAx>
       <c:valAx>
         <c:axId val="-2113994440"/>
-        <c:scaling/>
+        <c:scaling>
+          <c:orientation val="minMax"/>
+        </c:scaling>
         <c:delete val="0"/>
         <c:axPos val="l"/>
         <c:majorGridlines/>
+        <c:numFmt formatCode="General" sourceLinked="1"/>
         <c:majorTickMark val="out"/>
         <c:minorTickMark val="none"/>
         <c:tickLblPos val="nextTo"/>
         <c:crossAx val="-2068027336"/>
         <c:crosses val="autoZero"/>
+        <c:crossBetween val="between"/>
       </c:valAx>
     </c:plotArea>
+    <c:plotVisOnly val="1"/>
     <c:dispBlanksAs val="gap"/>
+    <c:showDLblsOverMax val="1"/>
   </c:chart>
   <c:txPr>
     <a:bodyPr/>
@@ -477,10 +559,9 @@
           <a:lstStyle/>
           <a:p>
             <a:r>
-              <a:rPr lang="en-US" smtClean="0"/>
+              <a:rPr lang="en-US"/>
               <a:t>Click to edit Master title style</a:t>
             </a:r>
-            <a:endParaRPr lang="en-US"/>
           </a:p>
         </p:txBody>
       </p:sp>
@@ -596,10 +677,9 @@
           </a:lstStyle>
           <a:p>
             <a:r>
-              <a:rPr lang="en-US" smtClean="0"/>
+              <a:rPr lang="en-US"/>
               <a:t>Click to edit Master subtitle style</a:t>
             </a:r>
-            <a:endParaRPr lang="en-US"/>
           </a:p>
         </p:txBody>
       </p:sp>
@@ -620,7 +700,7 @@
           <a:p>
             <a:fld id="{5BCAD085-E8A6-8845-BD4E-CB4CCA059FC4}" type="datetimeFigureOut">
               <a:rPr lang="en-US" smtClean="0"/>
-              <a:t>1/27/13</a:t>
+              <a:t>4/2/2026</a:t>
             </a:fld>
             <a:endParaRPr lang="en-US"/>
           </a:p>
@@ -662,7 +742,7 @@
           <a:p>
             <a:fld id="{C1FF6DA9-008F-8B48-92A6-B652298478BF}" type="slidenum">
               <a:rPr lang="en-US" smtClean="0"/>
-              <a:t>‹#›</a:t>
+              <a:t>‹N°›</a:t>
             </a:fld>
             <a:endParaRPr lang="en-US"/>
           </a:p>
@@ -714,10 +794,9 @@
           <a:lstStyle/>
           <a:p>
             <a:r>
-              <a:rPr lang="en-US" smtClean="0"/>
+              <a:rPr lang="en-US"/>
               <a:t>Click to edit Master title style</a:t>
             </a:r>
-            <a:endParaRPr lang="en-US"/>
           </a:p>
         </p:txBody>
       </p:sp>
@@ -738,38 +817,37 @@
           <a:p>
             <a:pPr lvl="0"/>
             <a:r>
-              <a:rPr lang="en-US" smtClean="0"/>
+              <a:rPr lang="en-US"/>
               <a:t>Click to edit Master text styles</a:t>
             </a:r>
           </a:p>
           <a:p>
             <a:pPr lvl="1"/>
             <a:r>
-              <a:rPr lang="en-US" smtClean="0"/>
+              <a:rPr lang="en-US"/>
               <a:t>Second level</a:t>
             </a:r>
           </a:p>
           <a:p>
             <a:pPr lvl="2"/>
             <a:r>
-              <a:rPr lang="en-US" smtClean="0"/>
+              <a:rPr lang="en-US"/>
               <a:t>Third level</a:t>
             </a:r>
           </a:p>
           <a:p>
             <a:pPr lvl="3"/>
             <a:r>
-              <a:rPr lang="en-US" smtClean="0"/>
+              <a:rPr lang="en-US"/>
               <a:t>Fourth level</a:t>
             </a:r>
           </a:p>
           <a:p>
             <a:pPr lvl="4"/>
             <a:r>
-              <a:rPr lang="en-US" smtClean="0"/>
+              <a:rPr lang="en-US"/>
               <a:t>Fifth level</a:t>
             </a:r>
-            <a:endParaRPr lang="en-US"/>
           </a:p>
         </p:txBody>
       </p:sp>
@@ -790,7 +868,7 @@
           <a:p>
             <a:fld id="{5BCAD085-E8A6-8845-BD4E-CB4CCA059FC4}" type="datetimeFigureOut">
               <a:rPr lang="en-US" smtClean="0"/>
-              <a:t>1/27/13</a:t>
+              <a:t>4/2/2026</a:t>
             </a:fld>
             <a:endParaRPr lang="en-US"/>
           </a:p>
@@ -832,7 +910,7 @@
           <a:p>
             <a:fld id="{C1FF6DA9-008F-8B48-92A6-B652298478BF}" type="slidenum">
               <a:rPr lang="en-US" smtClean="0"/>
-              <a:t>‹#›</a:t>
+              <a:t>‹N°›</a:t>
             </a:fld>
             <a:endParaRPr lang="en-US"/>
           </a:p>
@@ -889,10 +967,9 @@
           <a:lstStyle/>
           <a:p>
             <a:r>
-              <a:rPr lang="en-US" smtClean="0"/>
+              <a:rPr lang="en-US"/>
               <a:t>Click to edit Master title style</a:t>
             </a:r>
-            <a:endParaRPr lang="en-US"/>
           </a:p>
         </p:txBody>
       </p:sp>
@@ -918,38 +995,37 @@
           <a:p>
             <a:pPr lvl="0"/>
             <a:r>
-              <a:rPr lang="en-US" smtClean="0"/>
+              <a:rPr lang="en-US"/>
               <a:t>Click to edit Master text styles</a:t>
             </a:r>
           </a:p>
           <a:p>
             <a:pPr lvl="1"/>
             <a:r>
-              <a:rPr lang="en-US" smtClean="0"/>
+              <a:rPr lang="en-US"/>
               <a:t>Second level</a:t>
             </a:r>
           </a:p>
           <a:p>
             <a:pPr lvl="2"/>
             <a:r>
-              <a:rPr lang="en-US" smtClean="0"/>
+              <a:rPr lang="en-US"/>
               <a:t>Third level</a:t>
             </a:r>
           </a:p>
           <a:p>
             <a:pPr lvl="3"/>
             <a:r>
-              <a:rPr lang="en-US" smtClean="0"/>
+              <a:rPr lang="en-US"/>
               <a:t>Fourth level</a:t>
             </a:r>
           </a:p>
           <a:p>
             <a:pPr lvl="4"/>
             <a:r>
-              <a:rPr lang="en-US" smtClean="0"/>
+              <a:rPr lang="en-US"/>
               <a:t>Fifth level</a:t>
             </a:r>
-            <a:endParaRPr lang="en-US"/>
           </a:p>
         </p:txBody>
       </p:sp>
@@ -970,7 +1046,7 @@
           <a:p>
             <a:fld id="{5BCAD085-E8A6-8845-BD4E-CB4CCA059FC4}" type="datetimeFigureOut">
               <a:rPr lang="en-US" smtClean="0"/>
-              <a:t>1/27/13</a:t>
+              <a:t>4/2/2026</a:t>
             </a:fld>
             <a:endParaRPr lang="en-US"/>
           </a:p>
@@ -1012,7 +1088,7 @@
           <a:p>
             <a:fld id="{C1FF6DA9-008F-8B48-92A6-B652298478BF}" type="slidenum">
               <a:rPr lang="en-US" smtClean="0"/>
-              <a:t>‹#›</a:t>
+              <a:t>‹N°›</a:t>
             </a:fld>
             <a:endParaRPr lang="en-US"/>
           </a:p>
@@ -1064,10 +1140,9 @@
           <a:lstStyle/>
           <a:p>
             <a:r>
-              <a:rPr lang="en-US" smtClean="0"/>
+              <a:rPr lang="en-US"/>
               <a:t>Click to edit Master title style</a:t>
             </a:r>
-            <a:endParaRPr lang="en-US"/>
           </a:p>
         </p:txBody>
       </p:sp>
@@ -1088,38 +1163,37 @@
           <a:p>
             <a:pPr lvl="0"/>
             <a:r>
-              <a:rPr lang="en-US" smtClean="0"/>
+              <a:rPr lang="en-US"/>
               <a:t>Click to edit Master text styles</a:t>
             </a:r>
           </a:p>
           <a:p>
             <a:pPr lvl="1"/>
             <a:r>
-              <a:rPr lang="en-US" smtClean="0"/>
+              <a:rPr lang="en-US"/>
               <a:t>Second level</a:t>
             </a:r>
           </a:p>
           <a:p>
             <a:pPr lvl="2"/>
             <a:r>
-              <a:rPr lang="en-US" smtClean="0"/>
+              <a:rPr lang="en-US"/>
               <a:t>Third level</a:t>
             </a:r>
           </a:p>
           <a:p>
             <a:pPr lvl="3"/>
             <a:r>
-              <a:rPr lang="en-US" smtClean="0"/>
+              <a:rPr lang="en-US"/>
               <a:t>Fourth level</a:t>
             </a:r>
           </a:p>
           <a:p>
             <a:pPr lvl="4"/>
             <a:r>
-              <a:rPr lang="en-US" smtClean="0"/>
+              <a:rPr lang="en-US"/>
               <a:t>Fifth level</a:t>
             </a:r>
-            <a:endParaRPr lang="en-US"/>
           </a:p>
         </p:txBody>
       </p:sp>
@@ -1140,7 +1214,7 @@
           <a:p>
             <a:fld id="{5BCAD085-E8A6-8845-BD4E-CB4CCA059FC4}" type="datetimeFigureOut">
               <a:rPr lang="en-US" smtClean="0"/>
-              <a:t>1/27/13</a:t>
+              <a:t>4/2/2026</a:t>
             </a:fld>
             <a:endParaRPr lang="en-US"/>
           </a:p>
@@ -1182,7 +1256,7 @@
           <a:p>
             <a:fld id="{C1FF6DA9-008F-8B48-92A6-B652298478BF}" type="slidenum">
               <a:rPr lang="en-US" smtClean="0"/>
-              <a:t>‹#›</a:t>
+              <a:t>‹N°›</a:t>
             </a:fld>
             <a:endParaRPr lang="en-US"/>
           </a:p>
@@ -1243,10 +1317,9 @@
           </a:lstStyle>
           <a:p>
             <a:r>
-              <a:rPr lang="en-US" smtClean="0"/>
+              <a:rPr lang="en-US"/>
               <a:t>Click to edit Master title style</a:t>
             </a:r>
-            <a:endParaRPr lang="en-US"/>
           </a:p>
         </p:txBody>
       </p:sp>
@@ -1363,7 +1436,7 @@
           <a:p>
             <a:pPr lvl="0"/>
             <a:r>
-              <a:rPr lang="en-US" smtClean="0"/>
+              <a:rPr lang="en-US"/>
               <a:t>Click to edit Master text styles</a:t>
             </a:r>
           </a:p>
@@ -1386,7 +1459,7 @@
           <a:p>
             <a:fld id="{5BCAD085-E8A6-8845-BD4E-CB4CCA059FC4}" type="datetimeFigureOut">
               <a:rPr lang="en-US" smtClean="0"/>
-              <a:t>1/27/13</a:t>
+              <a:t>4/2/2026</a:t>
             </a:fld>
             <a:endParaRPr lang="en-US"/>
           </a:p>
@@ -1428,7 +1501,7 @@
           <a:p>
             <a:fld id="{C1FF6DA9-008F-8B48-92A6-B652298478BF}" type="slidenum">
               <a:rPr lang="en-US" smtClean="0"/>
-              <a:t>‹#›</a:t>
+              <a:t>‹N°›</a:t>
             </a:fld>
             <a:endParaRPr lang="en-US"/>
           </a:p>
@@ -1480,10 +1553,9 @@
           <a:lstStyle/>
           <a:p>
             <a:r>
-              <a:rPr lang="en-US" smtClean="0"/>
+              <a:rPr lang="en-US"/>
               <a:t>Click to edit Master title style</a:t>
             </a:r>
-            <a:endParaRPr lang="en-US"/>
           </a:p>
         </p:txBody>
       </p:sp>
@@ -1537,38 +1609,37 @@
           <a:p>
             <a:pPr lvl="0"/>
             <a:r>
-              <a:rPr lang="en-US" smtClean="0"/>
+              <a:rPr lang="en-US"/>
               <a:t>Click to edit Master text styles</a:t>
             </a:r>
           </a:p>
           <a:p>
             <a:pPr lvl="1"/>
             <a:r>
-              <a:rPr lang="en-US" smtClean="0"/>
+              <a:rPr lang="en-US"/>
               <a:t>Second level</a:t>
             </a:r>
           </a:p>
           <a:p>
             <a:pPr lvl="2"/>
             <a:r>
-              <a:rPr lang="en-US" smtClean="0"/>
+              <a:rPr lang="en-US"/>
               <a:t>Third level</a:t>
             </a:r>
           </a:p>
           <a:p>
             <a:pPr lvl="3"/>
             <a:r>
-              <a:rPr lang="en-US" smtClean="0"/>
+              <a:rPr lang="en-US"/>
               <a:t>Fourth level</a:t>
             </a:r>
           </a:p>
           <a:p>
             <a:pPr lvl="4"/>
             <a:r>
-              <a:rPr lang="en-US" smtClean="0"/>
+              <a:rPr lang="en-US"/>
               <a:t>Fifth level</a:t>
             </a:r>
-            <a:endParaRPr lang="en-US"/>
           </a:p>
         </p:txBody>
       </p:sp>
@@ -1622,38 +1693,37 @@
           <a:p>
             <a:pPr lvl="0"/>
             <a:r>
-              <a:rPr lang="en-US" smtClean="0"/>
+              <a:rPr lang="en-US"/>
               <a:t>Click to edit Master text styles</a:t>
             </a:r>
           </a:p>
           <a:p>
             <a:pPr lvl="1"/>
             <a:r>
-              <a:rPr lang="en-US" smtClean="0"/>
+              <a:rPr lang="en-US"/>
               <a:t>Second level</a:t>
             </a:r>
           </a:p>
           <a:p>
             <a:pPr lvl="2"/>
             <a:r>
-              <a:rPr lang="en-US" smtClean="0"/>
+              <a:rPr lang="en-US"/>
               <a:t>Third level</a:t>
             </a:r>
           </a:p>
           <a:p>
             <a:pPr lvl="3"/>
             <a:r>
-              <a:rPr lang="en-US" smtClean="0"/>
+              <a:rPr lang="en-US"/>
               <a:t>Fourth level</a:t>
             </a:r>
           </a:p>
           <a:p>
             <a:pPr lvl="4"/>
             <a:r>
-              <a:rPr lang="en-US" smtClean="0"/>
+              <a:rPr lang="en-US"/>
               <a:t>Fifth level</a:t>
             </a:r>
-            <a:endParaRPr lang="en-US"/>
           </a:p>
         </p:txBody>
       </p:sp>
@@ -1674,7 +1744,7 @@
           <a:p>
             <a:fld id="{5BCAD085-E8A6-8845-BD4E-CB4CCA059FC4}" type="datetimeFigureOut">
               <a:rPr lang="en-US" smtClean="0"/>
-              <a:t>1/27/13</a:t>
+              <a:t>4/2/2026</a:t>
             </a:fld>
             <a:endParaRPr lang="en-US"/>
           </a:p>
@@ -1716,7 +1786,7 @@
           <a:p>
             <a:fld id="{C1FF6DA9-008F-8B48-92A6-B652298478BF}" type="slidenum">
               <a:rPr lang="en-US" smtClean="0"/>
-              <a:t>‹#›</a:t>
+              <a:t>‹N°›</a:t>
             </a:fld>
             <a:endParaRPr lang="en-US"/>
           </a:p>
@@ -1772,10 +1842,9 @@
           </a:lstStyle>
           <a:p>
             <a:r>
-              <a:rPr lang="en-US" smtClean="0"/>
+              <a:rPr lang="en-US"/>
               <a:t>Click to edit Master title style</a:t>
             </a:r>
-            <a:endParaRPr lang="en-US"/>
           </a:p>
         </p:txBody>
       </p:sp>
@@ -1838,7 +1907,7 @@
           <a:p>
             <a:pPr lvl="0"/>
             <a:r>
-              <a:rPr lang="en-US" smtClean="0"/>
+              <a:rPr lang="en-US"/>
               <a:t>Click to edit Master text styles</a:t>
             </a:r>
           </a:p>
@@ -1894,38 +1963,37 @@
           <a:p>
             <a:pPr lvl="0"/>
             <a:r>
-              <a:rPr lang="en-US" smtClean="0"/>
+              <a:rPr lang="en-US"/>
               <a:t>Click to edit Master text styles</a:t>
             </a:r>
           </a:p>
           <a:p>
             <a:pPr lvl="1"/>
             <a:r>
-              <a:rPr lang="en-US" smtClean="0"/>
+              <a:rPr lang="en-US"/>
               <a:t>Second level</a:t>
             </a:r>
           </a:p>
           <a:p>
             <a:pPr lvl="2"/>
             <a:r>
-              <a:rPr lang="en-US" smtClean="0"/>
+              <a:rPr lang="en-US"/>
               <a:t>Third level</a:t>
             </a:r>
           </a:p>
           <a:p>
             <a:pPr lvl="3"/>
             <a:r>
-              <a:rPr lang="en-US" smtClean="0"/>
+              <a:rPr lang="en-US"/>
               <a:t>Fourth level</a:t>
             </a:r>
           </a:p>
           <a:p>
             <a:pPr lvl="4"/>
             <a:r>
-              <a:rPr lang="en-US" smtClean="0"/>
+              <a:rPr lang="en-US"/>
               <a:t>Fifth level</a:t>
             </a:r>
-            <a:endParaRPr lang="en-US"/>
           </a:p>
         </p:txBody>
       </p:sp>
@@ -1988,7 +2056,7 @@
           <a:p>
             <a:pPr lvl="0"/>
             <a:r>
-              <a:rPr lang="en-US" smtClean="0"/>
+              <a:rPr lang="en-US"/>
               <a:t>Click to edit Master text styles</a:t>
             </a:r>
           </a:p>
@@ -2044,38 +2112,37 @@
           <a:p>
             <a:pPr lvl="0"/>
             <a:r>
-              <a:rPr lang="en-US" smtClean="0"/>
+              <a:rPr lang="en-US"/>
               <a:t>Click to edit Master text styles</a:t>
             </a:r>
           </a:p>
           <a:p>
             <a:pPr lvl="1"/>
             <a:r>
-              <a:rPr lang="en-US" smtClean="0"/>
+              <a:rPr lang="en-US"/>
               <a:t>Second level</a:t>
             </a:r>
           </a:p>
           <a:p>
             <a:pPr lvl="2"/>
             <a:r>
-              <a:rPr lang="en-US" smtClean="0"/>
+              <a:rPr lang="en-US"/>
               <a:t>Third level</a:t>
             </a:r>
           </a:p>
           <a:p>
             <a:pPr lvl="3"/>
             <a:r>
-              <a:rPr lang="en-US" smtClean="0"/>
+              <a:rPr lang="en-US"/>
               <a:t>Fourth level</a:t>
             </a:r>
           </a:p>
           <a:p>
             <a:pPr lvl="4"/>
             <a:r>
-              <a:rPr lang="en-US" smtClean="0"/>
+              <a:rPr lang="en-US"/>
               <a:t>Fifth level</a:t>
             </a:r>
-            <a:endParaRPr lang="en-US"/>
           </a:p>
         </p:txBody>
       </p:sp>
@@ -2096,7 +2163,7 @@
           <a:p>
             <a:fld id="{5BCAD085-E8A6-8845-BD4E-CB4CCA059FC4}" type="datetimeFigureOut">
               <a:rPr lang="en-US" smtClean="0"/>
-              <a:t>1/27/13</a:t>
+              <a:t>4/2/2026</a:t>
             </a:fld>
             <a:endParaRPr lang="en-US"/>
           </a:p>
@@ -2138,7 +2205,7 @@
           <a:p>
             <a:fld id="{C1FF6DA9-008F-8B48-92A6-B652298478BF}" type="slidenum">
               <a:rPr lang="en-US" smtClean="0"/>
-              <a:t>‹#›</a:t>
+              <a:t>‹N°›</a:t>
             </a:fld>
             <a:endParaRPr lang="en-US"/>
           </a:p>
@@ -2190,10 +2257,9 @@
           <a:lstStyle/>
           <a:p>
             <a:r>
-              <a:rPr lang="en-US" smtClean="0"/>
+              <a:rPr lang="en-US"/>
               <a:t>Click to edit Master title style</a:t>
             </a:r>
-            <a:endParaRPr lang="en-US"/>
           </a:p>
         </p:txBody>
       </p:sp>
@@ -2214,7 +2280,7 @@
           <a:p>
             <a:fld id="{5BCAD085-E8A6-8845-BD4E-CB4CCA059FC4}" type="datetimeFigureOut">
               <a:rPr lang="en-US" smtClean="0"/>
-              <a:t>1/27/13</a:t>
+              <a:t>4/2/2026</a:t>
             </a:fld>
             <a:endParaRPr lang="en-US"/>
           </a:p>
@@ -2256,7 +2322,7 @@
           <a:p>
             <a:fld id="{C1FF6DA9-008F-8B48-92A6-B652298478BF}" type="slidenum">
               <a:rPr lang="en-US" smtClean="0"/>
-              <a:t>‹#›</a:t>
+              <a:t>‹N°›</a:t>
             </a:fld>
             <a:endParaRPr lang="en-US"/>
           </a:p>
@@ -2309,7 +2375,7 @@
           <a:p>
             <a:fld id="{5BCAD085-E8A6-8845-BD4E-CB4CCA059FC4}" type="datetimeFigureOut">
               <a:rPr lang="en-US" smtClean="0"/>
-              <a:t>1/27/13</a:t>
+              <a:t>4/2/2026</a:t>
             </a:fld>
             <a:endParaRPr lang="en-US"/>
           </a:p>
@@ -2351,7 +2417,7 @@
           <a:p>
             <a:fld id="{C1FF6DA9-008F-8B48-92A6-B652298478BF}" type="slidenum">
               <a:rPr lang="en-US" smtClean="0"/>
-              <a:t>‹#›</a:t>
+              <a:t>‹N°›</a:t>
             </a:fld>
             <a:endParaRPr lang="en-US"/>
           </a:p>
@@ -2412,10 +2478,9 @@
           </a:lstStyle>
           <a:p>
             <a:r>
-              <a:rPr lang="en-US" smtClean="0"/>
+              <a:rPr lang="en-US"/>
               <a:t>Click to edit Master title style</a:t>
             </a:r>
-            <a:endParaRPr lang="en-US"/>
           </a:p>
         </p:txBody>
       </p:sp>
@@ -2469,38 +2534,37 @@
           <a:p>
             <a:pPr lvl="0"/>
             <a:r>
-              <a:rPr lang="en-US" smtClean="0"/>
+              <a:rPr lang="en-US"/>
               <a:t>Click to edit Master text styles</a:t>
             </a:r>
           </a:p>
           <a:p>
             <a:pPr lvl="1"/>
             <a:r>
-              <a:rPr lang="en-US" smtClean="0"/>
+              <a:rPr lang="en-US"/>
               <a:t>Second level</a:t>
             </a:r>
           </a:p>
           <a:p>
             <a:pPr lvl="2"/>
             <a:r>
-              <a:rPr lang="en-US" smtClean="0"/>
+              <a:rPr lang="en-US"/>
               <a:t>Third level</a:t>
             </a:r>
           </a:p>
           <a:p>
             <a:pPr lvl="3"/>
             <a:r>
-              <a:rPr lang="en-US" smtClean="0"/>
+              <a:rPr lang="en-US"/>
               <a:t>Fourth level</a:t>
             </a:r>
           </a:p>
           <a:p>
             <a:pPr lvl="4"/>
             <a:r>
-              <a:rPr lang="en-US" smtClean="0"/>
+              <a:rPr lang="en-US"/>
               <a:t>Fifth level</a:t>
             </a:r>
-            <a:endParaRPr lang="en-US"/>
           </a:p>
         </p:txBody>
       </p:sp>
@@ -2563,7 +2627,7 @@
           <a:p>
             <a:pPr lvl="0"/>
             <a:r>
-              <a:rPr lang="en-US" smtClean="0"/>
+              <a:rPr lang="en-US"/>
               <a:t>Click to edit Master text styles</a:t>
             </a:r>
           </a:p>
@@ -2586,7 +2650,7 @@
           <a:p>
             <a:fld id="{5BCAD085-E8A6-8845-BD4E-CB4CCA059FC4}" type="datetimeFigureOut">
               <a:rPr lang="en-US" smtClean="0"/>
-              <a:t>1/27/13</a:t>
+              <a:t>4/2/2026</a:t>
             </a:fld>
             <a:endParaRPr lang="en-US"/>
           </a:p>
@@ -2628,7 +2692,7 @@
           <a:p>
             <a:fld id="{C1FF6DA9-008F-8B48-92A6-B652298478BF}" type="slidenum">
               <a:rPr lang="en-US" smtClean="0"/>
-              <a:t>‹#›</a:t>
+              <a:t>‹N°›</a:t>
             </a:fld>
             <a:endParaRPr lang="en-US"/>
           </a:p>
@@ -2689,10 +2753,9 @@
           </a:lstStyle>
           <a:p>
             <a:r>
-              <a:rPr lang="en-US" smtClean="0"/>
+              <a:rPr lang="en-US"/>
               <a:t>Click to edit Master title style</a:t>
             </a:r>
-            <a:endParaRPr lang="en-US"/>
           </a:p>
         </p:txBody>
       </p:sp>
@@ -2816,7 +2879,7 @@
           <a:p>
             <a:pPr lvl="0"/>
             <a:r>
-              <a:rPr lang="en-US" smtClean="0"/>
+              <a:rPr lang="en-US"/>
               <a:t>Click to edit Master text styles</a:t>
             </a:r>
           </a:p>
@@ -2839,7 +2902,7 @@
           <a:p>
             <a:fld id="{5BCAD085-E8A6-8845-BD4E-CB4CCA059FC4}" type="datetimeFigureOut">
               <a:rPr lang="en-US" smtClean="0"/>
-              <a:t>1/27/13</a:t>
+              <a:t>4/2/2026</a:t>
             </a:fld>
             <a:endParaRPr lang="en-US"/>
           </a:p>
@@ -2881,7 +2944,7 @@
           <a:p>
             <a:fld id="{C1FF6DA9-008F-8B48-92A6-B652298478BF}" type="slidenum">
               <a:rPr lang="en-US" smtClean="0"/>
-              <a:t>‹#›</a:t>
+              <a:t>‹N°›</a:t>
             </a:fld>
             <a:endParaRPr lang="en-US"/>
           </a:p>
@@ -2948,10 +3011,9 @@
           <a:lstStyle/>
           <a:p>
             <a:r>
-              <a:rPr lang="en-US" smtClean="0"/>
+              <a:rPr lang="en-US"/>
               <a:t>Click to edit Master title style</a:t>
             </a:r>
-            <a:endParaRPr lang="en-US"/>
           </a:p>
         </p:txBody>
       </p:sp>
@@ -2982,38 +3044,37 @@
           <a:p>
             <a:pPr lvl="0"/>
             <a:r>
-              <a:rPr lang="en-US" smtClean="0"/>
+              <a:rPr lang="en-US"/>
               <a:t>Click to edit Master text styles</a:t>
             </a:r>
           </a:p>
           <a:p>
             <a:pPr lvl="1"/>
             <a:r>
-              <a:rPr lang="en-US" smtClean="0"/>
+              <a:rPr lang="en-US"/>
               <a:t>Second level</a:t>
             </a:r>
           </a:p>
           <a:p>
             <a:pPr lvl="2"/>
             <a:r>
-              <a:rPr lang="en-US" smtClean="0"/>
+              <a:rPr lang="en-US"/>
               <a:t>Third level</a:t>
             </a:r>
           </a:p>
           <a:p>
             <a:pPr lvl="3"/>
             <a:r>
-              <a:rPr lang="en-US" smtClean="0"/>
+              <a:rPr lang="en-US"/>
               <a:t>Fourth level</a:t>
             </a:r>
           </a:p>
           <a:p>
             <a:pPr lvl="4"/>
             <a:r>
-              <a:rPr lang="en-US" smtClean="0"/>
+              <a:rPr lang="en-US"/>
               <a:t>Fifth level</a:t>
             </a:r>
-            <a:endParaRPr lang="en-US"/>
           </a:p>
         </p:txBody>
       </p:sp>
@@ -3052,7 +3113,7 @@
           <a:p>
             <a:fld id="{5BCAD085-E8A6-8845-BD4E-CB4CCA059FC4}" type="datetimeFigureOut">
               <a:rPr lang="en-US" smtClean="0"/>
-              <a:t>1/27/13</a:t>
+              <a:t>4/2/2026</a:t>
             </a:fld>
             <a:endParaRPr lang="en-US"/>
           </a:p>
@@ -3130,7 +3191,7 @@
           <a:p>
             <a:fld id="{C1FF6DA9-008F-8B48-92A6-B652298478BF}" type="slidenum">
               <a:rPr lang="en-US" smtClean="0"/>
-              <a:t>‹#›</a:t>
+              <a:t>‹N°›</a:t>
             </a:fld>
             <a:endParaRPr lang="en-US"/>
           </a:p>
@@ -3411,7 +3472,7 @@
 </file>
 
 <file path=ppt/slides/slide1.xml><?xml version="1.0" encoding="utf-8"?>
-<p:sld xmlns:a="http://schemas.openxmlformats.org/drawingml/2006/main" xmlns:p="http://schemas.openxmlformats.org/presentationml/2006/main" xmlns:r="http://schemas.openxmlformats.org/officeDocument/2006/relationships">
+<p:sld xmlns:a="http://schemas.openxmlformats.org/drawingml/2006/main" xmlns:r="http://schemas.openxmlformats.org/officeDocument/2006/relationships" xmlns:p="http://schemas.openxmlformats.org/presentationml/2006/main">
   <p:cSld>
     <p:bg>
       <p:bgPr>
@@ -3427,7 +3488,14 @@
         <p:cNvGrpSpPr/>
         <p:nvPr/>
       </p:nvGrpSpPr>
-      <p:grpSpPr/>
+      <p:grpSpPr>
+        <a:xfrm>
+          <a:off x="0" y="0"/>
+          <a:ext cx="0" cy="0"/>
+          <a:chOff x="0" y="0"/>
+          <a:chExt cx="0" cy="0"/>
+        </a:xfrm>
+      </p:grpSpPr>
       <p:sp>
         <p:nvSpPr>
           <p:cNvPr id="2" name="Rectangle 1"/>
@@ -3468,6 +3536,7 @@
           <a:lstStyle/>
           <a:p>
             <a:pPr algn="ctr"/>
+            <a:endParaRPr/>
           </a:p>
         </p:txBody>
       </p:sp>
@@ -3511,6 +3580,7 @@
           <a:lstStyle/>
           <a:p>
             <a:pPr algn="ctr"/>
+            <a:endParaRPr/>
           </a:p>
         </p:txBody>
       </p:sp>
@@ -3554,6 +3624,7 @@
           <a:lstStyle/>
           <a:p>
             <a:pPr algn="ctr"/>
+            <a:endParaRPr/>
           </a:p>
         </p:txBody>
       </p:sp>
@@ -3597,6 +3668,7 @@
           <a:lstStyle/>
           <a:p>
             <a:pPr algn="ctr"/>
+            <a:endParaRPr/>
           </a:p>
         </p:txBody>
       </p:sp>
@@ -3640,6 +3712,7 @@
           <a:lstStyle/>
           <a:p>
             <a:pPr algn="ctr"/>
+            <a:endParaRPr/>
           </a:p>
         </p:txBody>
       </p:sp>
@@ -3707,6 +3780,7 @@
           <a:lstStyle/>
           <a:p>
             <a:pPr algn="ctr"/>
+            <a:endParaRPr/>
           </a:p>
         </p:txBody>
       </p:sp>
@@ -3820,6 +3894,7 @@
           <a:lstStyle/>
           <a:p>
             <a:pPr algn="ctr"/>
+            <a:endParaRPr/>
           </a:p>
         </p:txBody>
       </p:sp>
@@ -3863,6 +3938,7 @@
           <a:lstStyle/>
           <a:p>
             <a:pPr algn="ctr"/>
+            <a:endParaRPr/>
           </a:p>
         </p:txBody>
       </p:sp>
@@ -3976,6 +4052,7 @@
           <a:lstStyle/>
           <a:p>
             <a:pPr algn="ctr"/>
+            <a:endParaRPr/>
           </a:p>
         </p:txBody>
       </p:sp>
@@ -4019,6 +4096,7 @@
           <a:lstStyle/>
           <a:p>
             <a:pPr algn="ctr"/>
+            <a:endParaRPr/>
           </a:p>
         </p:txBody>
       </p:sp>
@@ -4132,6 +4210,7 @@
           <a:lstStyle/>
           <a:p>
             <a:pPr algn="ctr"/>
+            <a:endParaRPr/>
           </a:p>
         </p:txBody>
       </p:sp>
@@ -4175,6 +4254,7 @@
           <a:lstStyle/>
           <a:p>
             <a:pPr algn="ctr"/>
+            <a:endParaRPr/>
           </a:p>
         </p:txBody>
       </p:sp>
@@ -4323,7 +4403,7 @@
 </file>
 
 <file path=ppt/slides/slide10.xml><?xml version="1.0" encoding="utf-8"?>
-<p:sld xmlns:a="http://schemas.openxmlformats.org/drawingml/2006/main" xmlns:p="http://schemas.openxmlformats.org/presentationml/2006/main" xmlns:r="http://schemas.openxmlformats.org/officeDocument/2006/relationships">
+<p:sld xmlns:a="http://schemas.openxmlformats.org/drawingml/2006/main" xmlns:r="http://schemas.openxmlformats.org/officeDocument/2006/relationships" xmlns:p="http://schemas.openxmlformats.org/presentationml/2006/main">
   <p:cSld>
     <p:bg>
       <p:bgPr>
@@ -4339,7 +4419,14 @@
         <p:cNvGrpSpPr/>
         <p:nvPr/>
       </p:nvGrpSpPr>
-      <p:grpSpPr/>
+      <p:grpSpPr>
+        <a:xfrm>
+          <a:off x="0" y="0"/>
+          <a:ext cx="0" cy="0"/>
+          <a:chOff x="0" y="0"/>
+          <a:chExt cx="0" cy="0"/>
+        </a:xfrm>
+      </p:grpSpPr>
       <p:sp>
         <p:nvSpPr>
           <p:cNvPr id="2" name="Rectangle 1"/>
@@ -4380,6 +4467,7 @@
           <a:lstStyle/>
           <a:p>
             <a:pPr algn="ctr"/>
+            <a:endParaRPr/>
           </a:p>
         </p:txBody>
       </p:sp>
@@ -4423,6 +4511,7 @@
           <a:lstStyle/>
           <a:p>
             <a:pPr algn="ctr"/>
+            <a:endParaRPr/>
           </a:p>
         </p:txBody>
       </p:sp>
@@ -4568,6 +4657,7 @@
           <a:lstStyle/>
           <a:p>
             <a:pPr algn="ctr"/>
+            <a:endParaRPr/>
           </a:p>
         </p:txBody>
       </p:sp>
@@ -4645,6 +4735,7 @@
           <a:lstStyle/>
           <a:p>
             <a:pPr algn="ctr"/>
+            <a:endParaRPr/>
           </a:p>
         </p:txBody>
       </p:sp>
@@ -4688,6 +4779,7 @@
           <a:lstStyle/>
           <a:p>
             <a:pPr algn="ctr"/>
+            <a:endParaRPr/>
           </a:p>
         </p:txBody>
       </p:sp>
@@ -4767,6 +4859,7 @@
           <a:lstStyle/>
           <a:p>
             <a:pPr algn="ctr"/>
+            <a:endParaRPr/>
           </a:p>
         </p:txBody>
       </p:sp>
@@ -4844,6 +4937,7 @@
           <a:lstStyle/>
           <a:p>
             <a:pPr algn="ctr"/>
+            <a:endParaRPr/>
           </a:p>
         </p:txBody>
       </p:sp>
@@ -4921,6 +5015,7 @@
           <a:lstStyle/>
           <a:p>
             <a:pPr algn="ctr"/>
+            <a:endParaRPr/>
           </a:p>
         </p:txBody>
       </p:sp>
@@ -4964,6 +5059,7 @@
           <a:lstStyle/>
           <a:p>
             <a:pPr algn="ctr"/>
+            <a:endParaRPr/>
           </a:p>
         </p:txBody>
       </p:sp>
@@ -5043,6 +5139,7 @@
           <a:lstStyle/>
           <a:p>
             <a:pPr algn="ctr"/>
+            <a:endParaRPr/>
           </a:p>
         </p:txBody>
       </p:sp>
@@ -5120,6 +5217,7 @@
           <a:lstStyle/>
           <a:p>
             <a:pPr algn="ctr"/>
+            <a:endParaRPr/>
           </a:p>
         </p:txBody>
       </p:sp>
@@ -5197,6 +5295,7 @@
           <a:lstStyle/>
           <a:p>
             <a:pPr algn="ctr"/>
+            <a:endParaRPr/>
           </a:p>
         </p:txBody>
       </p:sp>
@@ -5240,6 +5339,7 @@
           <a:lstStyle/>
           <a:p>
             <a:pPr algn="ctr"/>
+            <a:endParaRPr/>
           </a:p>
         </p:txBody>
       </p:sp>
@@ -5319,6 +5419,7 @@
           <a:lstStyle/>
           <a:p>
             <a:pPr algn="ctr"/>
+            <a:endParaRPr/>
           </a:p>
         </p:txBody>
       </p:sp>
@@ -5396,6 +5497,7 @@
           <a:lstStyle/>
           <a:p>
             <a:pPr algn="ctr"/>
+            <a:endParaRPr/>
           </a:p>
         </p:txBody>
       </p:sp>
@@ -5473,6 +5575,7 @@
           <a:lstStyle/>
           <a:p>
             <a:pPr algn="ctr"/>
+            <a:endParaRPr/>
           </a:p>
         </p:txBody>
       </p:sp>
@@ -5516,6 +5619,7 @@
           <a:lstStyle/>
           <a:p>
             <a:pPr algn="ctr"/>
+            <a:endParaRPr/>
           </a:p>
         </p:txBody>
       </p:sp>
@@ -5595,6 +5699,7 @@
           <a:lstStyle/>
           <a:p>
             <a:pPr algn="ctr"/>
+            <a:endParaRPr/>
           </a:p>
         </p:txBody>
       </p:sp>
@@ -5672,6 +5777,7 @@
           <a:lstStyle/>
           <a:p>
             <a:pPr algn="ctr"/>
+            <a:endParaRPr/>
           </a:p>
         </p:txBody>
       </p:sp>
@@ -5751,6 +5857,7 @@
           <a:lstStyle/>
           <a:p>
             <a:pPr algn="ctr"/>
+            <a:endParaRPr/>
           </a:p>
         </p:txBody>
       </p:sp>
@@ -5797,7 +5904,7 @@
 </file>
 
 <file path=ppt/slides/slide11.xml><?xml version="1.0" encoding="utf-8"?>
-<p:sld xmlns:a="http://schemas.openxmlformats.org/drawingml/2006/main" xmlns:p="http://schemas.openxmlformats.org/presentationml/2006/main" xmlns:r="http://schemas.openxmlformats.org/officeDocument/2006/relationships">
+<p:sld xmlns:a="http://schemas.openxmlformats.org/drawingml/2006/main" xmlns:r="http://schemas.openxmlformats.org/officeDocument/2006/relationships" xmlns:p="http://schemas.openxmlformats.org/presentationml/2006/main">
   <p:cSld>
     <p:bg>
       <p:bgPr>
@@ -5813,7 +5920,14 @@
         <p:cNvGrpSpPr/>
         <p:nvPr/>
       </p:nvGrpSpPr>
-      <p:grpSpPr/>
+      <p:grpSpPr>
+        <a:xfrm>
+          <a:off x="0" y="0"/>
+          <a:ext cx="0" cy="0"/>
+          <a:chOff x="0" y="0"/>
+          <a:chExt cx="0" cy="0"/>
+        </a:xfrm>
+      </p:grpSpPr>
       <p:sp>
         <p:nvSpPr>
           <p:cNvPr id="2" name="Rectangle 1"/>
@@ -5854,6 +5968,7 @@
           <a:lstStyle/>
           <a:p>
             <a:pPr algn="ctr"/>
+            <a:endParaRPr/>
           </a:p>
         </p:txBody>
       </p:sp>
@@ -5897,6 +6012,7 @@
           <a:lstStyle/>
           <a:p>
             <a:pPr algn="ctr"/>
+            <a:endParaRPr/>
           </a:p>
         </p:txBody>
       </p:sp>
@@ -6042,6 +6158,7 @@
           <a:lstStyle/>
           <a:p>
             <a:pPr algn="ctr"/>
+            <a:endParaRPr/>
           </a:p>
         </p:txBody>
       </p:sp>
@@ -6119,6 +6236,7 @@
           <a:lstStyle/>
           <a:p>
             <a:pPr algn="ctr"/>
+            <a:endParaRPr/>
           </a:p>
         </p:txBody>
       </p:sp>
@@ -6196,6 +6314,7 @@
           <a:lstStyle/>
           <a:p>
             <a:pPr algn="ctr"/>
+            <a:endParaRPr/>
           </a:p>
         </p:txBody>
       </p:sp>
@@ -6273,6 +6392,7 @@
           <a:lstStyle/>
           <a:p>
             <a:pPr algn="ctr"/>
+            <a:endParaRPr/>
           </a:p>
         </p:txBody>
       </p:sp>
@@ -6350,6 +6470,7 @@
           <a:lstStyle/>
           <a:p>
             <a:pPr algn="ctr"/>
+            <a:endParaRPr/>
           </a:p>
         </p:txBody>
       </p:sp>
@@ -6427,6 +6548,7 @@
           <a:lstStyle/>
           <a:p>
             <a:pPr algn="ctr"/>
+            <a:endParaRPr/>
           </a:p>
         </p:txBody>
       </p:sp>
@@ -6504,6 +6626,7 @@
           <a:lstStyle/>
           <a:p>
             <a:pPr algn="ctr"/>
+            <a:endParaRPr/>
           </a:p>
         </p:txBody>
       </p:sp>
@@ -6581,6 +6704,7 @@
           <a:lstStyle/>
           <a:p>
             <a:pPr algn="ctr"/>
+            <a:endParaRPr/>
           </a:p>
         </p:txBody>
       </p:sp>
@@ -6658,6 +6782,7 @@
           <a:lstStyle/>
           <a:p>
             <a:pPr algn="ctr"/>
+            <a:endParaRPr/>
           </a:p>
         </p:txBody>
       </p:sp>
@@ -6735,6 +6860,7 @@
           <a:lstStyle/>
           <a:p>
             <a:pPr algn="ctr"/>
+            <a:endParaRPr/>
           </a:p>
         </p:txBody>
       </p:sp>
@@ -6814,6 +6940,7 @@
           <a:lstStyle/>
           <a:p>
             <a:pPr algn="ctr"/>
+            <a:endParaRPr/>
           </a:p>
         </p:txBody>
       </p:sp>
@@ -6857,6 +6984,7 @@
           <a:lstStyle/>
           <a:p>
             <a:pPr algn="ctr"/>
+            <a:endParaRPr/>
           </a:p>
         </p:txBody>
       </p:sp>
@@ -6934,6 +7062,7 @@
           <a:lstStyle/>
           <a:p>
             <a:pPr algn="ctr"/>
+            <a:endParaRPr/>
           </a:p>
         </p:txBody>
       </p:sp>
@@ -7011,6 +7140,7 @@
           <a:lstStyle/>
           <a:p>
             <a:pPr algn="ctr"/>
+            <a:endParaRPr/>
           </a:p>
         </p:txBody>
       </p:sp>
@@ -7088,6 +7218,7 @@
           <a:lstStyle/>
           <a:p>
             <a:pPr algn="ctr"/>
+            <a:endParaRPr/>
           </a:p>
         </p:txBody>
       </p:sp>
@@ -7165,6 +7296,7 @@
           <a:lstStyle/>
           <a:p>
             <a:pPr algn="ctr"/>
+            <a:endParaRPr/>
           </a:p>
         </p:txBody>
       </p:sp>
@@ -7242,6 +7374,7 @@
           <a:lstStyle/>
           <a:p>
             <a:pPr algn="ctr"/>
+            <a:endParaRPr/>
           </a:p>
         </p:txBody>
       </p:sp>
@@ -7319,6 +7452,7 @@
           <a:lstStyle/>
           <a:p>
             <a:pPr algn="ctr"/>
+            <a:endParaRPr/>
           </a:p>
         </p:txBody>
       </p:sp>
@@ -7396,6 +7530,7 @@
           <a:lstStyle/>
           <a:p>
             <a:pPr algn="ctr"/>
+            <a:endParaRPr/>
           </a:p>
         </p:txBody>
       </p:sp>
@@ -7473,6 +7608,7 @@
           <a:lstStyle/>
           <a:p>
             <a:pPr algn="ctr"/>
+            <a:endParaRPr/>
           </a:p>
         </p:txBody>
       </p:sp>
@@ -7552,6 +7688,7 @@
           <a:lstStyle/>
           <a:p>
             <a:pPr algn="ctr"/>
+            <a:endParaRPr/>
           </a:p>
         </p:txBody>
       </p:sp>
@@ -7595,6 +7732,7 @@
           <a:lstStyle/>
           <a:p>
             <a:pPr algn="ctr"/>
+            <a:endParaRPr/>
           </a:p>
         </p:txBody>
       </p:sp>
@@ -7672,6 +7810,7 @@
           <a:lstStyle/>
           <a:p>
             <a:pPr algn="ctr"/>
+            <a:endParaRPr/>
           </a:p>
         </p:txBody>
       </p:sp>
@@ -7749,6 +7888,7 @@
           <a:lstStyle/>
           <a:p>
             <a:pPr algn="ctr"/>
+            <a:endParaRPr/>
           </a:p>
         </p:txBody>
       </p:sp>
@@ -7826,6 +7966,7 @@
           <a:lstStyle/>
           <a:p>
             <a:pPr algn="ctr"/>
+            <a:endParaRPr/>
           </a:p>
         </p:txBody>
       </p:sp>
@@ -7903,6 +8044,7 @@
           <a:lstStyle/>
           <a:p>
             <a:pPr algn="ctr"/>
+            <a:endParaRPr/>
           </a:p>
         </p:txBody>
       </p:sp>
@@ -7980,6 +8122,7 @@
           <a:lstStyle/>
           <a:p>
             <a:pPr algn="ctr"/>
+            <a:endParaRPr/>
           </a:p>
         </p:txBody>
       </p:sp>
@@ -8057,6 +8200,7 @@
           <a:lstStyle/>
           <a:p>
             <a:pPr algn="ctr"/>
+            <a:endParaRPr/>
           </a:p>
         </p:txBody>
       </p:sp>
@@ -8134,6 +8278,7 @@
           <a:lstStyle/>
           <a:p>
             <a:pPr algn="ctr"/>
+            <a:endParaRPr/>
           </a:p>
         </p:txBody>
       </p:sp>
@@ -8211,6 +8356,7 @@
           <a:lstStyle/>
           <a:p>
             <a:pPr algn="ctr"/>
+            <a:endParaRPr/>
           </a:p>
         </p:txBody>
       </p:sp>
@@ -8290,6 +8436,7 @@
           <a:lstStyle/>
           <a:p>
             <a:pPr algn="ctr"/>
+            <a:endParaRPr/>
           </a:p>
         </p:txBody>
       </p:sp>
@@ -8333,6 +8480,7 @@
           <a:lstStyle/>
           <a:p>
             <a:pPr algn="ctr"/>
+            <a:endParaRPr/>
           </a:p>
         </p:txBody>
       </p:sp>
@@ -8410,6 +8558,7 @@
           <a:lstStyle/>
           <a:p>
             <a:pPr algn="ctr"/>
+            <a:endParaRPr/>
           </a:p>
         </p:txBody>
       </p:sp>
@@ -8487,6 +8636,7 @@
           <a:lstStyle/>
           <a:p>
             <a:pPr algn="ctr"/>
+            <a:endParaRPr/>
           </a:p>
         </p:txBody>
       </p:sp>
@@ -8564,6 +8714,7 @@
           <a:lstStyle/>
           <a:p>
             <a:pPr algn="ctr"/>
+            <a:endParaRPr/>
           </a:p>
         </p:txBody>
       </p:sp>
@@ -8641,6 +8792,7 @@
           <a:lstStyle/>
           <a:p>
             <a:pPr algn="ctr"/>
+            <a:endParaRPr/>
           </a:p>
         </p:txBody>
       </p:sp>
@@ -8718,6 +8870,7 @@
           <a:lstStyle/>
           <a:p>
             <a:pPr algn="ctr"/>
+            <a:endParaRPr/>
           </a:p>
         </p:txBody>
       </p:sp>
@@ -8795,6 +8948,7 @@
           <a:lstStyle/>
           <a:p>
             <a:pPr algn="ctr"/>
+            <a:endParaRPr/>
           </a:p>
         </p:txBody>
       </p:sp>
@@ -8872,6 +9026,7 @@
           <a:lstStyle/>
           <a:p>
             <a:pPr algn="ctr"/>
+            <a:endParaRPr/>
           </a:p>
         </p:txBody>
       </p:sp>
@@ -8949,6 +9104,7 @@
           <a:lstStyle/>
           <a:p>
             <a:pPr algn="ctr"/>
+            <a:endParaRPr/>
           </a:p>
         </p:txBody>
       </p:sp>
@@ -9028,6 +9184,7 @@
           <a:lstStyle/>
           <a:p>
             <a:pPr algn="ctr"/>
+            <a:endParaRPr/>
           </a:p>
         </p:txBody>
       </p:sp>
@@ -9071,6 +9228,7 @@
           <a:lstStyle/>
           <a:p>
             <a:pPr algn="ctr"/>
+            <a:endParaRPr/>
           </a:p>
         </p:txBody>
       </p:sp>
@@ -9148,6 +9306,7 @@
           <a:lstStyle/>
           <a:p>
             <a:pPr algn="ctr"/>
+            <a:endParaRPr/>
           </a:p>
         </p:txBody>
       </p:sp>
@@ -9225,6 +9384,7 @@
           <a:lstStyle/>
           <a:p>
             <a:pPr algn="ctr"/>
+            <a:endParaRPr/>
           </a:p>
         </p:txBody>
       </p:sp>
@@ -9302,6 +9462,7 @@
           <a:lstStyle/>
           <a:p>
             <a:pPr algn="ctr"/>
+            <a:endParaRPr/>
           </a:p>
         </p:txBody>
       </p:sp>
@@ -9379,6 +9540,7 @@
           <a:lstStyle/>
           <a:p>
             <a:pPr algn="ctr"/>
+            <a:endParaRPr/>
           </a:p>
         </p:txBody>
       </p:sp>
@@ -9456,6 +9618,7 @@
           <a:lstStyle/>
           <a:p>
             <a:pPr algn="ctr"/>
+            <a:endParaRPr/>
           </a:p>
         </p:txBody>
       </p:sp>
@@ -9533,6 +9696,7 @@
           <a:lstStyle/>
           <a:p>
             <a:pPr algn="ctr"/>
+            <a:endParaRPr/>
           </a:p>
         </p:txBody>
       </p:sp>
@@ -9610,6 +9774,7 @@
           <a:lstStyle/>
           <a:p>
             <a:pPr algn="ctr"/>
+            <a:endParaRPr/>
           </a:p>
         </p:txBody>
       </p:sp>
@@ -9687,6 +9852,7 @@
           <a:lstStyle/>
           <a:p>
             <a:pPr algn="ctr"/>
+            <a:endParaRPr/>
           </a:p>
         </p:txBody>
       </p:sp>
@@ -9766,6 +9932,7 @@
           <a:lstStyle/>
           <a:p>
             <a:pPr algn="ctr"/>
+            <a:endParaRPr/>
           </a:p>
         </p:txBody>
       </p:sp>
@@ -9809,6 +9976,7 @@
           <a:lstStyle/>
           <a:p>
             <a:pPr algn="ctr"/>
+            <a:endParaRPr/>
           </a:p>
         </p:txBody>
       </p:sp>
@@ -9886,6 +10054,7 @@
           <a:lstStyle/>
           <a:p>
             <a:pPr algn="ctr"/>
+            <a:endParaRPr/>
           </a:p>
         </p:txBody>
       </p:sp>
@@ -9963,6 +10132,7 @@
           <a:lstStyle/>
           <a:p>
             <a:pPr algn="ctr"/>
+            <a:endParaRPr/>
           </a:p>
         </p:txBody>
       </p:sp>
@@ -10040,6 +10210,7 @@
           <a:lstStyle/>
           <a:p>
             <a:pPr algn="ctr"/>
+            <a:endParaRPr/>
           </a:p>
         </p:txBody>
       </p:sp>
@@ -10117,6 +10288,7 @@
           <a:lstStyle/>
           <a:p>
             <a:pPr algn="ctr"/>
+            <a:endParaRPr/>
           </a:p>
         </p:txBody>
       </p:sp>
@@ -10194,6 +10366,7 @@
           <a:lstStyle/>
           <a:p>
             <a:pPr algn="ctr"/>
+            <a:endParaRPr/>
           </a:p>
         </p:txBody>
       </p:sp>
@@ -10271,6 +10444,7 @@
           <a:lstStyle/>
           <a:p>
             <a:pPr algn="ctr"/>
+            <a:endParaRPr/>
           </a:p>
         </p:txBody>
       </p:sp>
@@ -10348,6 +10522,7 @@
           <a:lstStyle/>
           <a:p>
             <a:pPr algn="ctr"/>
+            <a:endParaRPr/>
           </a:p>
         </p:txBody>
       </p:sp>
@@ -10425,6 +10600,7 @@
           <a:lstStyle/>
           <a:p>
             <a:pPr algn="ctr"/>
+            <a:endParaRPr/>
           </a:p>
         </p:txBody>
       </p:sp>
@@ -10504,6 +10680,7 @@
           <a:lstStyle/>
           <a:p>
             <a:pPr algn="ctr"/>
+            <a:endParaRPr/>
           </a:p>
         </p:txBody>
       </p:sp>
@@ -10547,6 +10724,7 @@
           <a:lstStyle/>
           <a:p>
             <a:pPr algn="ctr"/>
+            <a:endParaRPr/>
           </a:p>
         </p:txBody>
       </p:sp>
@@ -10624,6 +10802,7 @@
           <a:lstStyle/>
           <a:p>
             <a:pPr algn="ctr"/>
+            <a:endParaRPr/>
           </a:p>
         </p:txBody>
       </p:sp>
@@ -10701,6 +10880,7 @@
           <a:lstStyle/>
           <a:p>
             <a:pPr algn="ctr"/>
+            <a:endParaRPr/>
           </a:p>
         </p:txBody>
       </p:sp>
@@ -10778,6 +10958,7 @@
           <a:lstStyle/>
           <a:p>
             <a:pPr algn="ctr"/>
+            <a:endParaRPr/>
           </a:p>
         </p:txBody>
       </p:sp>
@@ -10855,6 +11036,7 @@
           <a:lstStyle/>
           <a:p>
             <a:pPr algn="ctr"/>
+            <a:endParaRPr/>
           </a:p>
         </p:txBody>
       </p:sp>
@@ -10932,6 +11114,7 @@
           <a:lstStyle/>
           <a:p>
             <a:pPr algn="ctr"/>
+            <a:endParaRPr/>
           </a:p>
         </p:txBody>
       </p:sp>
@@ -11009,6 +11192,7 @@
           <a:lstStyle/>
           <a:p>
             <a:pPr algn="ctr"/>
+            <a:endParaRPr/>
           </a:p>
         </p:txBody>
       </p:sp>
@@ -11086,6 +11270,7 @@
           <a:lstStyle/>
           <a:p>
             <a:pPr algn="ctr"/>
+            <a:endParaRPr/>
           </a:p>
         </p:txBody>
       </p:sp>
@@ -11163,6 +11348,7 @@
           <a:lstStyle/>
           <a:p>
             <a:pPr algn="ctr"/>
+            <a:endParaRPr/>
           </a:p>
         </p:txBody>
       </p:sp>
@@ -11242,6 +11428,7 @@
           <a:lstStyle/>
           <a:p>
             <a:pPr algn="ctr"/>
+            <a:endParaRPr/>
           </a:p>
         </p:txBody>
       </p:sp>
@@ -11285,6 +11472,7 @@
           <a:lstStyle/>
           <a:p>
             <a:pPr algn="ctr"/>
+            <a:endParaRPr/>
           </a:p>
         </p:txBody>
       </p:sp>
@@ -11332,7 +11520,7 @@
 </file>
 
 <file path=ppt/slides/slide12.xml><?xml version="1.0" encoding="utf-8"?>
-<p:sld xmlns:a="http://schemas.openxmlformats.org/drawingml/2006/main" xmlns:p="http://schemas.openxmlformats.org/presentationml/2006/main" xmlns:r="http://schemas.openxmlformats.org/officeDocument/2006/relationships">
+<p:sld xmlns:a="http://schemas.openxmlformats.org/drawingml/2006/main" xmlns:r="http://schemas.openxmlformats.org/officeDocument/2006/relationships" xmlns:p="http://schemas.openxmlformats.org/presentationml/2006/main">
   <p:cSld>
     <p:bg>
       <p:bgPr>
@@ -11348,7 +11536,14 @@
         <p:cNvGrpSpPr/>
         <p:nvPr/>
       </p:nvGrpSpPr>
-      <p:grpSpPr/>
+      <p:grpSpPr>
+        <a:xfrm>
+          <a:off x="0" y="0"/>
+          <a:ext cx="0" cy="0"/>
+          <a:chOff x="0" y="0"/>
+          <a:chExt cx="0" cy="0"/>
+        </a:xfrm>
+      </p:grpSpPr>
       <p:sp>
         <p:nvSpPr>
           <p:cNvPr id="2" name="Rectangle 1"/>
@@ -11389,6 +11584,7 @@
           <a:lstStyle/>
           <a:p>
             <a:pPr algn="ctr"/>
+            <a:endParaRPr/>
           </a:p>
         </p:txBody>
       </p:sp>
@@ -11432,6 +11628,7 @@
           <a:lstStyle/>
           <a:p>
             <a:pPr algn="ctr"/>
+            <a:endParaRPr/>
           </a:p>
         </p:txBody>
       </p:sp>
@@ -11577,6 +11774,7 @@
           <a:lstStyle/>
           <a:p>
             <a:pPr algn="ctr"/>
+            <a:endParaRPr/>
           </a:p>
         </p:txBody>
       </p:sp>
@@ -11654,6 +11852,7 @@
           <a:lstStyle/>
           <a:p>
             <a:pPr algn="ctr"/>
+            <a:endParaRPr/>
           </a:p>
         </p:txBody>
       </p:sp>
@@ -11731,6 +11930,7 @@
           <a:lstStyle/>
           <a:p>
             <a:pPr algn="ctr"/>
+            <a:endParaRPr/>
           </a:p>
         </p:txBody>
       </p:sp>
@@ -11808,6 +12008,7 @@
           <a:lstStyle/>
           <a:p>
             <a:pPr algn="ctr"/>
+            <a:endParaRPr/>
           </a:p>
         </p:txBody>
       </p:sp>
@@ -11885,6 +12086,7 @@
           <a:lstStyle/>
           <a:p>
             <a:pPr algn="ctr"/>
+            <a:endParaRPr/>
           </a:p>
         </p:txBody>
       </p:sp>
@@ -11962,6 +12164,7 @@
           <a:lstStyle/>
           <a:p>
             <a:pPr algn="ctr"/>
+            <a:endParaRPr/>
           </a:p>
         </p:txBody>
       </p:sp>
@@ -12039,6 +12242,7 @@
           <a:lstStyle/>
           <a:p>
             <a:pPr algn="ctr"/>
+            <a:endParaRPr/>
           </a:p>
         </p:txBody>
       </p:sp>
@@ -12116,6 +12320,7 @@
           <a:lstStyle/>
           <a:p>
             <a:pPr algn="ctr"/>
+            <a:endParaRPr/>
           </a:p>
         </p:txBody>
       </p:sp>
@@ -12193,6 +12398,7 @@
           <a:lstStyle/>
           <a:p>
             <a:pPr algn="ctr"/>
+            <a:endParaRPr/>
           </a:p>
         </p:txBody>
       </p:sp>
@@ -12270,6 +12476,7 @@
           <a:lstStyle/>
           <a:p>
             <a:pPr algn="ctr"/>
+            <a:endParaRPr/>
           </a:p>
         </p:txBody>
       </p:sp>
@@ -12349,6 +12556,7 @@
           <a:lstStyle/>
           <a:p>
             <a:pPr algn="ctr"/>
+            <a:endParaRPr/>
           </a:p>
         </p:txBody>
       </p:sp>
@@ -12392,6 +12600,7 @@
           <a:lstStyle/>
           <a:p>
             <a:pPr algn="ctr"/>
+            <a:endParaRPr/>
           </a:p>
         </p:txBody>
       </p:sp>
@@ -12469,6 +12678,7 @@
           <a:lstStyle/>
           <a:p>
             <a:pPr algn="ctr"/>
+            <a:endParaRPr/>
           </a:p>
         </p:txBody>
       </p:sp>
@@ -12546,6 +12756,7 @@
           <a:lstStyle/>
           <a:p>
             <a:pPr algn="ctr"/>
+            <a:endParaRPr/>
           </a:p>
         </p:txBody>
       </p:sp>
@@ -12623,6 +12834,7 @@
           <a:lstStyle/>
           <a:p>
             <a:pPr algn="ctr"/>
+            <a:endParaRPr/>
           </a:p>
         </p:txBody>
       </p:sp>
@@ -12700,6 +12912,7 @@
           <a:lstStyle/>
           <a:p>
             <a:pPr algn="ctr"/>
+            <a:endParaRPr/>
           </a:p>
         </p:txBody>
       </p:sp>
@@ -12777,6 +12990,7 @@
           <a:lstStyle/>
           <a:p>
             <a:pPr algn="ctr"/>
+            <a:endParaRPr/>
           </a:p>
         </p:txBody>
       </p:sp>
@@ -12854,6 +13068,7 @@
           <a:lstStyle/>
           <a:p>
             <a:pPr algn="ctr"/>
+            <a:endParaRPr/>
           </a:p>
         </p:txBody>
       </p:sp>
@@ -12931,6 +13146,7 @@
           <a:lstStyle/>
           <a:p>
             <a:pPr algn="ctr"/>
+            <a:endParaRPr/>
           </a:p>
         </p:txBody>
       </p:sp>
@@ -13008,6 +13224,7 @@
           <a:lstStyle/>
           <a:p>
             <a:pPr algn="ctr"/>
+            <a:endParaRPr/>
           </a:p>
         </p:txBody>
       </p:sp>
@@ -13087,6 +13304,7 @@
           <a:lstStyle/>
           <a:p>
             <a:pPr algn="ctr"/>
+            <a:endParaRPr/>
           </a:p>
         </p:txBody>
       </p:sp>
@@ -13130,6 +13348,7 @@
           <a:lstStyle/>
           <a:p>
             <a:pPr algn="ctr"/>
+            <a:endParaRPr/>
           </a:p>
         </p:txBody>
       </p:sp>
@@ -13207,6 +13426,7 @@
           <a:lstStyle/>
           <a:p>
             <a:pPr algn="ctr"/>
+            <a:endParaRPr/>
           </a:p>
         </p:txBody>
       </p:sp>
@@ -13284,6 +13504,7 @@
           <a:lstStyle/>
           <a:p>
             <a:pPr algn="ctr"/>
+            <a:endParaRPr/>
           </a:p>
         </p:txBody>
       </p:sp>
@@ -13361,6 +13582,7 @@
           <a:lstStyle/>
           <a:p>
             <a:pPr algn="ctr"/>
+            <a:endParaRPr/>
           </a:p>
         </p:txBody>
       </p:sp>
@@ -13438,6 +13660,7 @@
           <a:lstStyle/>
           <a:p>
             <a:pPr algn="ctr"/>
+            <a:endParaRPr/>
           </a:p>
         </p:txBody>
       </p:sp>
@@ -13515,6 +13738,7 @@
           <a:lstStyle/>
           <a:p>
             <a:pPr algn="ctr"/>
+            <a:endParaRPr/>
           </a:p>
         </p:txBody>
       </p:sp>
@@ -13592,6 +13816,7 @@
           <a:lstStyle/>
           <a:p>
             <a:pPr algn="ctr"/>
+            <a:endParaRPr/>
           </a:p>
         </p:txBody>
       </p:sp>
@@ -13669,6 +13894,7 @@
           <a:lstStyle/>
           <a:p>
             <a:pPr algn="ctr"/>
+            <a:endParaRPr/>
           </a:p>
         </p:txBody>
       </p:sp>
@@ -13746,6 +13972,7 @@
           <a:lstStyle/>
           <a:p>
             <a:pPr algn="ctr"/>
+            <a:endParaRPr/>
           </a:p>
         </p:txBody>
       </p:sp>
@@ -13825,6 +14052,7 @@
           <a:lstStyle/>
           <a:p>
             <a:pPr algn="ctr"/>
+            <a:endParaRPr/>
           </a:p>
         </p:txBody>
       </p:sp>
@@ -13868,6 +14096,7 @@
           <a:lstStyle/>
           <a:p>
             <a:pPr algn="ctr"/>
+            <a:endParaRPr/>
           </a:p>
         </p:txBody>
       </p:sp>
@@ -13945,6 +14174,7 @@
           <a:lstStyle/>
           <a:p>
             <a:pPr algn="ctr"/>
+            <a:endParaRPr/>
           </a:p>
         </p:txBody>
       </p:sp>
@@ -14022,6 +14252,7 @@
           <a:lstStyle/>
           <a:p>
             <a:pPr algn="ctr"/>
+            <a:endParaRPr/>
           </a:p>
         </p:txBody>
       </p:sp>
@@ -14099,6 +14330,7 @@
           <a:lstStyle/>
           <a:p>
             <a:pPr algn="ctr"/>
+            <a:endParaRPr/>
           </a:p>
         </p:txBody>
       </p:sp>
@@ -14176,6 +14408,7 @@
           <a:lstStyle/>
           <a:p>
             <a:pPr algn="ctr"/>
+            <a:endParaRPr/>
           </a:p>
         </p:txBody>
       </p:sp>
@@ -14253,6 +14486,7 @@
           <a:lstStyle/>
           <a:p>
             <a:pPr algn="ctr"/>
+            <a:endParaRPr/>
           </a:p>
         </p:txBody>
       </p:sp>
@@ -14330,6 +14564,7 @@
           <a:lstStyle/>
           <a:p>
             <a:pPr algn="ctr"/>
+            <a:endParaRPr/>
           </a:p>
         </p:txBody>
       </p:sp>
@@ -14407,6 +14642,7 @@
           <a:lstStyle/>
           <a:p>
             <a:pPr algn="ctr"/>
+            <a:endParaRPr/>
           </a:p>
         </p:txBody>
       </p:sp>
@@ -14484,6 +14720,7 @@
           <a:lstStyle/>
           <a:p>
             <a:pPr algn="ctr"/>
+            <a:endParaRPr/>
           </a:p>
         </p:txBody>
       </p:sp>
@@ -14563,6 +14800,7 @@
           <a:lstStyle/>
           <a:p>
             <a:pPr algn="ctr"/>
+            <a:endParaRPr/>
           </a:p>
         </p:txBody>
       </p:sp>
@@ -14606,6 +14844,7 @@
           <a:lstStyle/>
           <a:p>
             <a:pPr algn="ctr"/>
+            <a:endParaRPr/>
           </a:p>
         </p:txBody>
       </p:sp>
@@ -14683,6 +14922,7 @@
           <a:lstStyle/>
           <a:p>
             <a:pPr algn="ctr"/>
+            <a:endParaRPr/>
           </a:p>
         </p:txBody>
       </p:sp>
@@ -14760,6 +15000,7 @@
           <a:lstStyle/>
           <a:p>
             <a:pPr algn="ctr"/>
+            <a:endParaRPr/>
           </a:p>
         </p:txBody>
       </p:sp>
@@ -14837,6 +15078,7 @@
           <a:lstStyle/>
           <a:p>
             <a:pPr algn="ctr"/>
+            <a:endParaRPr/>
           </a:p>
         </p:txBody>
       </p:sp>
@@ -14914,6 +15156,7 @@
           <a:lstStyle/>
           <a:p>
             <a:pPr algn="ctr"/>
+            <a:endParaRPr/>
           </a:p>
         </p:txBody>
       </p:sp>
@@ -14991,6 +15234,7 @@
           <a:lstStyle/>
           <a:p>
             <a:pPr algn="ctr"/>
+            <a:endParaRPr/>
           </a:p>
         </p:txBody>
       </p:sp>
@@ -15068,6 +15312,7 @@
           <a:lstStyle/>
           <a:p>
             <a:pPr algn="ctr"/>
+            <a:endParaRPr/>
           </a:p>
         </p:txBody>
       </p:sp>
@@ -15145,6 +15390,7 @@
           <a:lstStyle/>
           <a:p>
             <a:pPr algn="ctr"/>
+            <a:endParaRPr/>
           </a:p>
         </p:txBody>
       </p:sp>
@@ -15222,6 +15468,7 @@
           <a:lstStyle/>
           <a:p>
             <a:pPr algn="ctr"/>
+            <a:endParaRPr/>
           </a:p>
         </p:txBody>
       </p:sp>
@@ -15301,6 +15548,7 @@
           <a:lstStyle/>
           <a:p>
             <a:pPr algn="ctr"/>
+            <a:endParaRPr/>
           </a:p>
         </p:txBody>
       </p:sp>
@@ -15344,6 +15592,7 @@
           <a:lstStyle/>
           <a:p>
             <a:pPr algn="ctr"/>
+            <a:endParaRPr/>
           </a:p>
         </p:txBody>
       </p:sp>
@@ -15421,6 +15670,7 @@
           <a:lstStyle/>
           <a:p>
             <a:pPr algn="ctr"/>
+            <a:endParaRPr/>
           </a:p>
         </p:txBody>
       </p:sp>
@@ -15498,6 +15748,7 @@
           <a:lstStyle/>
           <a:p>
             <a:pPr algn="ctr"/>
+            <a:endParaRPr/>
           </a:p>
         </p:txBody>
       </p:sp>
@@ -15575,6 +15826,7 @@
           <a:lstStyle/>
           <a:p>
             <a:pPr algn="ctr"/>
+            <a:endParaRPr/>
           </a:p>
         </p:txBody>
       </p:sp>
@@ -15652,6 +15904,7 @@
           <a:lstStyle/>
           <a:p>
             <a:pPr algn="ctr"/>
+            <a:endParaRPr/>
           </a:p>
         </p:txBody>
       </p:sp>
@@ -15729,6 +15982,7 @@
           <a:lstStyle/>
           <a:p>
             <a:pPr algn="ctr"/>
+            <a:endParaRPr/>
           </a:p>
         </p:txBody>
       </p:sp>
@@ -15806,6 +16060,7 @@
           <a:lstStyle/>
           <a:p>
             <a:pPr algn="ctr"/>
+            <a:endParaRPr/>
           </a:p>
         </p:txBody>
       </p:sp>
@@ -15883,6 +16138,7 @@
           <a:lstStyle/>
           <a:p>
             <a:pPr algn="ctr"/>
+            <a:endParaRPr/>
           </a:p>
         </p:txBody>
       </p:sp>
@@ -15960,6 +16216,7 @@
           <a:lstStyle/>
           <a:p>
             <a:pPr algn="ctr"/>
+            <a:endParaRPr/>
           </a:p>
         </p:txBody>
       </p:sp>
@@ -16039,6 +16296,7 @@
           <a:lstStyle/>
           <a:p>
             <a:pPr algn="ctr"/>
+            <a:endParaRPr/>
           </a:p>
         </p:txBody>
       </p:sp>
@@ -16082,6 +16340,7 @@
           <a:lstStyle/>
           <a:p>
             <a:pPr algn="ctr"/>
+            <a:endParaRPr/>
           </a:p>
         </p:txBody>
       </p:sp>
@@ -16159,6 +16418,7 @@
           <a:lstStyle/>
           <a:p>
             <a:pPr algn="ctr"/>
+            <a:endParaRPr/>
           </a:p>
         </p:txBody>
       </p:sp>
@@ -16237,6 +16497,7 @@
           <a:lstStyle/>
           <a:p>
             <a:pPr algn="ctr"/>
+            <a:endParaRPr/>
           </a:p>
         </p:txBody>
       </p:sp>
@@ -16315,6 +16576,7 @@
           <a:lstStyle/>
           <a:p>
             <a:pPr algn="ctr"/>
+            <a:endParaRPr/>
           </a:p>
         </p:txBody>
       </p:sp>
@@ -16393,6 +16655,7 @@
           <a:lstStyle/>
           <a:p>
             <a:pPr algn="ctr"/>
+            <a:endParaRPr/>
           </a:p>
         </p:txBody>
       </p:sp>
@@ -16471,6 +16734,7 @@
           <a:lstStyle/>
           <a:p>
             <a:pPr algn="ctr"/>
+            <a:endParaRPr/>
           </a:p>
         </p:txBody>
       </p:sp>
@@ -16549,6 +16813,7 @@
           <a:lstStyle/>
           <a:p>
             <a:pPr algn="ctr"/>
+            <a:endParaRPr/>
           </a:p>
         </p:txBody>
       </p:sp>
@@ -16627,6 +16892,7 @@
           <a:lstStyle/>
           <a:p>
             <a:pPr algn="ctr"/>
+            <a:endParaRPr/>
           </a:p>
         </p:txBody>
       </p:sp>
@@ -16705,6 +16971,7 @@
           <a:lstStyle/>
           <a:p>
             <a:pPr algn="ctr"/>
+            <a:endParaRPr/>
           </a:p>
         </p:txBody>
       </p:sp>
@@ -16785,6 +17052,7 @@
           <a:lstStyle/>
           <a:p>
             <a:pPr algn="ctr"/>
+            <a:endParaRPr/>
           </a:p>
         </p:txBody>
       </p:sp>
@@ -16828,6 +17096,7 @@
           <a:lstStyle/>
           <a:p>
             <a:pPr algn="ctr"/>
+            <a:endParaRPr/>
           </a:p>
         </p:txBody>
       </p:sp>
@@ -16905,6 +17174,7 @@
           <a:lstStyle/>
           <a:p>
             <a:pPr algn="ctr"/>
+            <a:endParaRPr/>
           </a:p>
         </p:txBody>
       </p:sp>
@@ -16982,6 +17252,7 @@
           <a:lstStyle/>
           <a:p>
             <a:pPr algn="ctr"/>
+            <a:endParaRPr/>
           </a:p>
         </p:txBody>
       </p:sp>
@@ -17059,6 +17330,7 @@
           <a:lstStyle/>
           <a:p>
             <a:pPr algn="ctr"/>
+            <a:endParaRPr/>
           </a:p>
         </p:txBody>
       </p:sp>
@@ -17136,6 +17408,7 @@
           <a:lstStyle/>
           <a:p>
             <a:pPr algn="ctr"/>
+            <a:endParaRPr/>
           </a:p>
         </p:txBody>
       </p:sp>
@@ -17213,6 +17486,7 @@
           <a:lstStyle/>
           <a:p>
             <a:pPr algn="ctr"/>
+            <a:endParaRPr/>
           </a:p>
         </p:txBody>
       </p:sp>
@@ -17290,6 +17564,7 @@
           <a:lstStyle/>
           <a:p>
             <a:pPr algn="ctr"/>
+            <a:endParaRPr/>
           </a:p>
         </p:txBody>
       </p:sp>
@@ -17367,6 +17642,7 @@
           <a:lstStyle/>
           <a:p>
             <a:pPr algn="ctr"/>
+            <a:endParaRPr/>
           </a:p>
         </p:txBody>
       </p:sp>
@@ -17444,6 +17720,7 @@
           <a:lstStyle/>
           <a:p>
             <a:pPr algn="ctr"/>
+            <a:endParaRPr/>
           </a:p>
         </p:txBody>
       </p:sp>
@@ -17523,6 +17800,7 @@
           <a:lstStyle/>
           <a:p>
             <a:pPr algn="ctr"/>
+            <a:endParaRPr/>
           </a:p>
         </p:txBody>
       </p:sp>
@@ -17566,6 +17844,7 @@
           <a:lstStyle/>
           <a:p>
             <a:pPr algn="ctr"/>
+            <a:endParaRPr/>
           </a:p>
         </p:txBody>
       </p:sp>
@@ -17643,6 +17922,7 @@
           <a:lstStyle/>
           <a:p>
             <a:pPr algn="ctr"/>
+            <a:endParaRPr/>
           </a:p>
         </p:txBody>
       </p:sp>
@@ -17720,6 +18000,7 @@
           <a:lstStyle/>
           <a:p>
             <a:pPr algn="ctr"/>
+            <a:endParaRPr/>
           </a:p>
         </p:txBody>
       </p:sp>
@@ -17797,6 +18078,7 @@
           <a:lstStyle/>
           <a:p>
             <a:pPr algn="ctr"/>
+            <a:endParaRPr/>
           </a:p>
         </p:txBody>
       </p:sp>
@@ -17874,6 +18156,7 @@
           <a:lstStyle/>
           <a:p>
             <a:pPr algn="ctr"/>
+            <a:endParaRPr/>
           </a:p>
         </p:txBody>
       </p:sp>
@@ -17951,6 +18234,7 @@
           <a:lstStyle/>
           <a:p>
             <a:pPr algn="ctr"/>
+            <a:endParaRPr/>
           </a:p>
         </p:txBody>
       </p:sp>
@@ -18028,6 +18312,7 @@
           <a:lstStyle/>
           <a:p>
             <a:pPr algn="ctr"/>
+            <a:endParaRPr/>
           </a:p>
         </p:txBody>
       </p:sp>
@@ -18105,6 +18390,7 @@
           <a:lstStyle/>
           <a:p>
             <a:pPr algn="ctr"/>
+            <a:endParaRPr/>
           </a:p>
         </p:txBody>
       </p:sp>
@@ -18182,6 +18468,7 @@
           <a:lstStyle/>
           <a:p>
             <a:pPr algn="ctr"/>
+            <a:endParaRPr/>
           </a:p>
         </p:txBody>
       </p:sp>
@@ -18261,6 +18548,7 @@
           <a:lstStyle/>
           <a:p>
             <a:pPr algn="ctr"/>
+            <a:endParaRPr/>
           </a:p>
         </p:txBody>
       </p:sp>
@@ -18307,7 +18595,7 @@
 </file>
 
 <file path=ppt/slides/slide13.xml><?xml version="1.0" encoding="utf-8"?>
-<p:sld xmlns:a="http://schemas.openxmlformats.org/drawingml/2006/main" xmlns:p="http://schemas.openxmlformats.org/presentationml/2006/main" xmlns:r="http://schemas.openxmlformats.org/officeDocument/2006/relationships">
+<p:sld xmlns:a="http://schemas.openxmlformats.org/drawingml/2006/main" xmlns:r="http://schemas.openxmlformats.org/officeDocument/2006/relationships" xmlns:p="http://schemas.openxmlformats.org/presentationml/2006/main">
   <p:cSld>
     <p:bg>
       <p:bgPr>
@@ -18323,7 +18611,14 @@
         <p:cNvGrpSpPr/>
         <p:nvPr/>
       </p:nvGrpSpPr>
-      <p:grpSpPr/>
+      <p:grpSpPr>
+        <a:xfrm>
+          <a:off x="0" y="0"/>
+          <a:ext cx="0" cy="0"/>
+          <a:chOff x="0" y="0"/>
+          <a:chExt cx="0" cy="0"/>
+        </a:xfrm>
+      </p:grpSpPr>
       <p:sp>
         <p:nvSpPr>
           <p:cNvPr id="2" name="Rectangle 1"/>
@@ -18364,6 +18659,7 @@
           <a:lstStyle/>
           <a:p>
             <a:pPr algn="ctr"/>
+            <a:endParaRPr/>
           </a:p>
         </p:txBody>
       </p:sp>
@@ -18407,6 +18703,7 @@
           <a:lstStyle/>
           <a:p>
             <a:pPr algn="ctr"/>
+            <a:endParaRPr/>
           </a:p>
         </p:txBody>
       </p:sp>
@@ -18552,6 +18849,7 @@
           <a:lstStyle/>
           <a:p>
             <a:pPr algn="ctr"/>
+            <a:endParaRPr/>
           </a:p>
         </p:txBody>
       </p:sp>
@@ -18603,7 +18901,7 @@
         </p:xfrm>
         <a:graphic>
           <a:graphicData uri="http://schemas.openxmlformats.org/drawingml/2006/chart">
-            <c:chart xmlns:c="http://schemas.openxmlformats.org/drawingml/2006/chart" r:id="rId2"/>
+            <c:chart xmlns:c="http://schemas.openxmlformats.org/drawingml/2006/chart" xmlns:r="http://schemas.openxmlformats.org/officeDocument/2006/relationships" r:id="rId2"/>
           </a:graphicData>
         </a:graphic>
       </p:graphicFrame>
@@ -18647,6 +18945,7 @@
           <a:lstStyle/>
           <a:p>
             <a:pPr algn="ctr"/>
+            <a:endParaRPr/>
           </a:p>
         </p:txBody>
       </p:sp>
@@ -18724,6 +19023,7 @@
           <a:lstStyle/>
           <a:p>
             <a:pPr algn="ctr"/>
+            <a:endParaRPr/>
           </a:p>
         </p:txBody>
       </p:sp>
@@ -18801,6 +19101,7 @@
           <a:lstStyle/>
           <a:p>
             <a:pPr algn="ctr"/>
+            <a:endParaRPr/>
           </a:p>
         </p:txBody>
       </p:sp>
@@ -18880,6 +19181,7 @@
           <a:lstStyle/>
           <a:p>
             <a:pPr algn="ctr"/>
+            <a:endParaRPr/>
           </a:p>
         </p:txBody>
       </p:sp>
@@ -18923,6 +19225,7 @@
           <a:lstStyle/>
           <a:p>
             <a:pPr algn="ctr"/>
+            <a:endParaRPr/>
           </a:p>
         </p:txBody>
       </p:sp>
@@ -19035,6 +19338,7 @@
           <a:lstStyle/>
           <a:p>
             <a:pPr algn="ctr"/>
+            <a:endParaRPr/>
           </a:p>
         </p:txBody>
       </p:sp>
@@ -19146,6 +19450,7 @@
           <a:lstStyle/>
           <a:p>
             <a:pPr algn="ctr"/>
+            <a:endParaRPr/>
           </a:p>
         </p:txBody>
       </p:sp>
@@ -19257,6 +19562,7 @@
           <a:lstStyle/>
           <a:p>
             <a:pPr algn="ctr"/>
+            <a:endParaRPr/>
           </a:p>
         </p:txBody>
       </p:sp>
@@ -19368,6 +19674,7 @@
           <a:lstStyle/>
           <a:p>
             <a:pPr algn="ctr"/>
+            <a:endParaRPr/>
           </a:p>
         </p:txBody>
       </p:sp>
@@ -19479,6 +19786,7 @@
           <a:lstStyle/>
           <a:p>
             <a:pPr algn="ctr"/>
+            <a:endParaRPr/>
           </a:p>
         </p:txBody>
       </p:sp>
@@ -19590,6 +19898,7 @@
           <a:lstStyle/>
           <a:p>
             <a:pPr algn="ctr"/>
+            <a:endParaRPr/>
           </a:p>
         </p:txBody>
       </p:sp>
@@ -19635,6 +19944,7 @@
           <a:lstStyle/>
           <a:p>
             <a:pPr algn="ctr"/>
+            <a:endParaRPr/>
           </a:p>
         </p:txBody>
       </p:sp>
@@ -19682,7 +19992,7 @@
 </file>
 
 <file path=ppt/slides/slide14.xml><?xml version="1.0" encoding="utf-8"?>
-<p:sld xmlns:a="http://schemas.openxmlformats.org/drawingml/2006/main" xmlns:p="http://schemas.openxmlformats.org/presentationml/2006/main" xmlns:r="http://schemas.openxmlformats.org/officeDocument/2006/relationships">
+<p:sld xmlns:a="http://schemas.openxmlformats.org/drawingml/2006/main" xmlns:r="http://schemas.openxmlformats.org/officeDocument/2006/relationships" xmlns:p="http://schemas.openxmlformats.org/presentationml/2006/main">
   <p:cSld>
     <p:bg>
       <p:bgPr>
@@ -19698,7 +20008,14 @@
         <p:cNvGrpSpPr/>
         <p:nvPr/>
       </p:nvGrpSpPr>
-      <p:grpSpPr/>
+      <p:grpSpPr>
+        <a:xfrm>
+          <a:off x="0" y="0"/>
+          <a:ext cx="0" cy="0"/>
+          <a:chOff x="0" y="0"/>
+          <a:chExt cx="0" cy="0"/>
+        </a:xfrm>
+      </p:grpSpPr>
       <p:sp>
         <p:nvSpPr>
           <p:cNvPr id="2" name="Rectangle 1"/>
@@ -19739,6 +20056,7 @@
           <a:lstStyle/>
           <a:p>
             <a:pPr algn="ctr"/>
+            <a:endParaRPr/>
           </a:p>
         </p:txBody>
       </p:sp>
@@ -19782,6 +20100,7 @@
           <a:lstStyle/>
           <a:p>
             <a:pPr algn="ctr"/>
+            <a:endParaRPr/>
           </a:p>
         </p:txBody>
       </p:sp>
@@ -19927,6 +20246,7 @@
           <a:lstStyle/>
           <a:p>
             <a:pPr algn="ctr"/>
+            <a:endParaRPr/>
           </a:p>
         </p:txBody>
       </p:sp>
@@ -20006,6 +20326,7 @@
           <a:lstStyle/>
           <a:p>
             <a:pPr algn="ctr"/>
+            <a:endParaRPr/>
           </a:p>
         </p:txBody>
       </p:sp>
@@ -20049,6 +20370,7 @@
           <a:lstStyle/>
           <a:p>
             <a:pPr algn="ctr"/>
+            <a:endParaRPr/>
           </a:p>
         </p:txBody>
       </p:sp>
@@ -20162,6 +20484,7 @@
           <a:lstStyle/>
           <a:p>
             <a:pPr algn="ctr"/>
+            <a:endParaRPr/>
           </a:p>
         </p:txBody>
       </p:sp>
@@ -20244,6 +20567,7 @@
           <a:lstStyle/>
           <a:p>
             <a:pPr algn="ctr"/>
+            <a:endParaRPr/>
           </a:p>
         </p:txBody>
       </p:sp>
@@ -20287,6 +20611,7 @@
           <a:lstStyle/>
           <a:p>
             <a:pPr algn="ctr"/>
+            <a:endParaRPr/>
           </a:p>
         </p:txBody>
       </p:sp>
@@ -20400,6 +20725,7 @@
           <a:lstStyle/>
           <a:p>
             <a:pPr algn="ctr"/>
+            <a:endParaRPr/>
           </a:p>
         </p:txBody>
       </p:sp>
@@ -20482,6 +20808,7 @@
           <a:lstStyle/>
           <a:p>
             <a:pPr algn="ctr"/>
+            <a:endParaRPr/>
           </a:p>
         </p:txBody>
       </p:sp>
@@ -20525,6 +20852,7 @@
           <a:lstStyle/>
           <a:p>
             <a:pPr algn="ctr"/>
+            <a:endParaRPr/>
           </a:p>
         </p:txBody>
       </p:sp>
@@ -20637,6 +20965,7 @@
           <a:lstStyle/>
           <a:p>
             <a:pPr algn="ctr"/>
+            <a:endParaRPr/>
           </a:p>
         </p:txBody>
       </p:sp>
@@ -20719,6 +21048,7 @@
           <a:lstStyle/>
           <a:p>
             <a:pPr algn="ctr"/>
+            <a:endParaRPr/>
           </a:p>
         </p:txBody>
       </p:sp>
@@ -20762,6 +21092,7 @@
           <a:lstStyle/>
           <a:p>
             <a:pPr algn="ctr"/>
+            <a:endParaRPr/>
           </a:p>
         </p:txBody>
       </p:sp>
@@ -20841,6 +21172,7 @@
           <a:lstStyle/>
           <a:p>
             <a:pPr algn="ctr"/>
+            <a:endParaRPr/>
           </a:p>
         </p:txBody>
       </p:sp>
@@ -20954,6 +21286,7 @@
           <a:lstStyle/>
           <a:p>
             <a:pPr algn="ctr"/>
+            <a:endParaRPr/>
           </a:p>
         </p:txBody>
       </p:sp>
@@ -21067,6 +21400,7 @@
           <a:lstStyle/>
           <a:p>
             <a:pPr algn="ctr"/>
+            <a:endParaRPr/>
           </a:p>
         </p:txBody>
       </p:sp>
@@ -21180,6 +21514,7 @@
           <a:lstStyle/>
           <a:p>
             <a:pPr algn="ctr"/>
+            <a:endParaRPr/>
           </a:p>
         </p:txBody>
       </p:sp>
@@ -21260,7 +21595,7 @@
 </file>
 
 <file path=ppt/slides/slide15.xml><?xml version="1.0" encoding="utf-8"?>
-<p:sld xmlns:a="http://schemas.openxmlformats.org/drawingml/2006/main" xmlns:p="http://schemas.openxmlformats.org/presentationml/2006/main" xmlns:r="http://schemas.openxmlformats.org/officeDocument/2006/relationships">
+<p:sld xmlns:a="http://schemas.openxmlformats.org/drawingml/2006/main" xmlns:r="http://schemas.openxmlformats.org/officeDocument/2006/relationships" xmlns:p="http://schemas.openxmlformats.org/presentationml/2006/main">
   <p:cSld>
     <p:bg>
       <p:bgPr>
@@ -21276,7 +21611,14 @@
         <p:cNvGrpSpPr/>
         <p:nvPr/>
       </p:nvGrpSpPr>
-      <p:grpSpPr/>
+      <p:grpSpPr>
+        <a:xfrm>
+          <a:off x="0" y="0"/>
+          <a:ext cx="0" cy="0"/>
+          <a:chOff x="0" y="0"/>
+          <a:chExt cx="0" cy="0"/>
+        </a:xfrm>
+      </p:grpSpPr>
       <p:sp>
         <p:nvSpPr>
           <p:cNvPr id="2" name="Rectangle 1"/>
@@ -21317,6 +21659,7 @@
           <a:lstStyle/>
           <a:p>
             <a:pPr algn="ctr"/>
+            <a:endParaRPr/>
           </a:p>
         </p:txBody>
       </p:sp>
@@ -21360,6 +21703,7 @@
           <a:lstStyle/>
           <a:p>
             <a:pPr algn="ctr"/>
+            <a:endParaRPr/>
           </a:p>
         </p:txBody>
       </p:sp>
@@ -21505,6 +21849,7 @@
           <a:lstStyle/>
           <a:p>
             <a:pPr algn="ctr"/>
+            <a:endParaRPr/>
           </a:p>
         </p:txBody>
       </p:sp>
@@ -21584,6 +21929,7 @@
           <a:lstStyle/>
           <a:p>
             <a:pPr algn="ctr"/>
+            <a:endParaRPr/>
           </a:p>
         </p:txBody>
       </p:sp>
@@ -21627,6 +21973,7 @@
           <a:lstStyle/>
           <a:p>
             <a:pPr algn="ctr"/>
+            <a:endParaRPr/>
           </a:p>
         </p:txBody>
       </p:sp>
@@ -21672,6 +22019,7 @@
           <a:lstStyle/>
           <a:p>
             <a:pPr algn="ctr"/>
+            <a:endParaRPr/>
           </a:p>
         </p:txBody>
       </p:sp>
@@ -21885,6 +22233,7 @@
           <a:lstStyle/>
           <a:p>
             <a:pPr algn="ctr"/>
+            <a:endParaRPr/>
           </a:p>
         </p:txBody>
       </p:sp>
@@ -21973,6 +22322,7 @@
           <a:lstStyle/>
           <a:p>
             <a:pPr algn="ctr"/>
+            <a:endParaRPr/>
           </a:p>
         </p:txBody>
       </p:sp>
@@ -22016,6 +22366,7 @@
           <a:lstStyle/>
           <a:p>
             <a:pPr algn="ctr"/>
+            <a:endParaRPr/>
           </a:p>
         </p:txBody>
       </p:sp>
@@ -22061,6 +22412,7 @@
           <a:lstStyle/>
           <a:p>
             <a:pPr algn="ctr"/>
+            <a:endParaRPr/>
           </a:p>
         </p:txBody>
       </p:sp>
@@ -22172,6 +22524,7 @@
           <a:lstStyle/>
           <a:p>
             <a:pPr algn="ctr"/>
+            <a:endParaRPr/>
           </a:p>
         </p:txBody>
       </p:sp>
@@ -22253,6 +22606,7 @@
           <a:lstStyle/>
           <a:p>
             <a:pPr algn="ctr"/>
+            <a:endParaRPr/>
           </a:p>
         </p:txBody>
       </p:sp>
@@ -22296,6 +22650,7 @@
           <a:lstStyle/>
           <a:p>
             <a:pPr algn="ctr"/>
+            <a:endParaRPr/>
           </a:p>
         </p:txBody>
       </p:sp>
@@ -22341,6 +22696,7 @@
           <a:lstStyle/>
           <a:p>
             <a:pPr algn="ctr"/>
+            <a:endParaRPr/>
           </a:p>
         </p:txBody>
       </p:sp>
@@ -22452,6 +22808,7 @@
           <a:lstStyle/>
           <a:p>
             <a:pPr algn="ctr"/>
+            <a:endParaRPr/>
           </a:p>
         </p:txBody>
       </p:sp>
@@ -22533,6 +22890,7 @@
           <a:lstStyle/>
           <a:p>
             <a:pPr algn="ctr"/>
+            <a:endParaRPr/>
           </a:p>
         </p:txBody>
       </p:sp>
@@ -22576,6 +22934,7 @@
           <a:lstStyle/>
           <a:p>
             <a:pPr algn="ctr"/>
+            <a:endParaRPr/>
           </a:p>
         </p:txBody>
       </p:sp>
@@ -22621,6 +22980,7 @@
           <a:lstStyle/>
           <a:p>
             <a:pPr algn="ctr"/>
+            <a:endParaRPr/>
           </a:p>
         </p:txBody>
       </p:sp>
@@ -22732,6 +23092,7 @@
           <a:lstStyle/>
           <a:p>
             <a:pPr algn="ctr"/>
+            <a:endParaRPr/>
           </a:p>
         </p:txBody>
       </p:sp>
@@ -22813,6 +23174,7 @@
           <a:lstStyle/>
           <a:p>
             <a:pPr algn="ctr"/>
+            <a:endParaRPr/>
           </a:p>
         </p:txBody>
       </p:sp>
@@ -22856,6 +23218,7 @@
           <a:lstStyle/>
           <a:p>
             <a:pPr algn="ctr"/>
+            <a:endParaRPr/>
           </a:p>
         </p:txBody>
       </p:sp>
@@ -22901,6 +23264,7 @@
           <a:lstStyle/>
           <a:p>
             <a:pPr algn="ctr"/>
+            <a:endParaRPr/>
           </a:p>
         </p:txBody>
       </p:sp>
@@ -23012,6 +23376,7 @@
           <a:lstStyle/>
           <a:p>
             <a:pPr algn="ctr"/>
+            <a:endParaRPr/>
           </a:p>
         </p:txBody>
       </p:sp>
@@ -23060,7 +23425,7 @@
 </file>
 
 <file path=ppt/slides/slide16.xml><?xml version="1.0" encoding="utf-8"?>
-<p:sld xmlns:a="http://schemas.openxmlformats.org/drawingml/2006/main" xmlns:p="http://schemas.openxmlformats.org/presentationml/2006/main" xmlns:r="http://schemas.openxmlformats.org/officeDocument/2006/relationships">
+<p:sld xmlns:a="http://schemas.openxmlformats.org/drawingml/2006/main" xmlns:r="http://schemas.openxmlformats.org/officeDocument/2006/relationships" xmlns:p="http://schemas.openxmlformats.org/presentationml/2006/main">
   <p:cSld>
     <p:bg>
       <p:bgPr>
@@ -23076,7 +23441,14 @@
         <p:cNvGrpSpPr/>
         <p:nvPr/>
       </p:nvGrpSpPr>
-      <p:grpSpPr/>
+      <p:grpSpPr>
+        <a:xfrm>
+          <a:off x="0" y="0"/>
+          <a:ext cx="0" cy="0"/>
+          <a:chOff x="0" y="0"/>
+          <a:chExt cx="0" cy="0"/>
+        </a:xfrm>
+      </p:grpSpPr>
       <p:sp>
         <p:nvSpPr>
           <p:cNvPr id="2" name="Rectangle 1"/>
@@ -23117,6 +23489,7 @@
           <a:lstStyle/>
           <a:p>
             <a:pPr algn="ctr"/>
+            <a:endParaRPr/>
           </a:p>
         </p:txBody>
       </p:sp>
@@ -23160,6 +23533,7 @@
           <a:lstStyle/>
           <a:p>
             <a:pPr algn="ctr"/>
+            <a:endParaRPr/>
           </a:p>
         </p:txBody>
       </p:sp>
@@ -23305,6 +23679,7 @@
           <a:lstStyle/>
           <a:p>
             <a:pPr algn="ctr"/>
+            <a:endParaRPr/>
           </a:p>
         </p:txBody>
       </p:sp>
@@ -23384,6 +23759,7 @@
           <a:lstStyle/>
           <a:p>
             <a:pPr algn="ctr"/>
+            <a:endParaRPr/>
           </a:p>
         </p:txBody>
       </p:sp>
@@ -23427,6 +23803,7 @@
           <a:lstStyle/>
           <a:p>
             <a:pPr algn="ctr"/>
+            <a:endParaRPr/>
           </a:p>
         </p:txBody>
       </p:sp>
@@ -23539,6 +23916,7 @@
           <a:lstStyle/>
           <a:p>
             <a:pPr algn="ctr"/>
+            <a:endParaRPr/>
           </a:p>
         </p:txBody>
       </p:sp>
@@ -23619,6 +23997,7 @@
           <a:lstStyle/>
           <a:p>
             <a:pPr algn="ctr"/>
+            <a:endParaRPr/>
           </a:p>
         </p:txBody>
       </p:sp>
@@ -23735,6 +24114,7 @@
           <a:lstStyle/>
           <a:p>
             <a:pPr algn="ctr"/>
+            <a:endParaRPr/>
           </a:p>
         </p:txBody>
       </p:sp>
@@ -23778,6 +24158,7 @@
           <a:lstStyle/>
           <a:p>
             <a:pPr algn="ctr"/>
+            <a:endParaRPr/>
           </a:p>
         </p:txBody>
       </p:sp>
@@ -23890,6 +24271,7 @@
           <a:lstStyle/>
           <a:p>
             <a:pPr algn="ctr"/>
+            <a:endParaRPr/>
           </a:p>
         </p:txBody>
       </p:sp>
@@ -23970,6 +24352,7 @@
           <a:lstStyle/>
           <a:p>
             <a:pPr algn="ctr"/>
+            <a:endParaRPr/>
           </a:p>
         </p:txBody>
       </p:sp>
@@ -24088,6 +24471,7 @@
           <a:lstStyle/>
           <a:p>
             <a:pPr algn="ctr"/>
+            <a:endParaRPr/>
           </a:p>
         </p:txBody>
       </p:sp>
@@ -24131,6 +24515,7 @@
           <a:lstStyle/>
           <a:p>
             <a:pPr algn="ctr"/>
+            <a:endParaRPr/>
           </a:p>
         </p:txBody>
       </p:sp>
@@ -24243,6 +24628,7 @@
           <a:lstStyle/>
           <a:p>
             <a:pPr algn="ctr"/>
+            <a:endParaRPr/>
           </a:p>
         </p:txBody>
       </p:sp>
@@ -24323,6 +24709,7 @@
           <a:lstStyle/>
           <a:p>
             <a:pPr algn="ctr"/>
+            <a:endParaRPr/>
           </a:p>
         </p:txBody>
       </p:sp>
@@ -24439,6 +24826,7 @@
           <a:lstStyle/>
           <a:p>
             <a:pPr algn="ctr"/>
+            <a:endParaRPr/>
           </a:p>
         </p:txBody>
       </p:sp>
@@ -24482,6 +24870,7 @@
           <a:lstStyle/>
           <a:p>
             <a:pPr algn="ctr"/>
+            <a:endParaRPr/>
           </a:p>
         </p:txBody>
       </p:sp>
@@ -24562,7 +24951,7 @@
 </file>
 
 <file path=ppt/slides/slide17.xml><?xml version="1.0" encoding="utf-8"?>
-<p:sld xmlns:a="http://schemas.openxmlformats.org/drawingml/2006/main" xmlns:p="http://schemas.openxmlformats.org/presentationml/2006/main" xmlns:r="http://schemas.openxmlformats.org/officeDocument/2006/relationships">
+<p:sld xmlns:a="http://schemas.openxmlformats.org/drawingml/2006/main" xmlns:r="http://schemas.openxmlformats.org/officeDocument/2006/relationships" xmlns:p="http://schemas.openxmlformats.org/presentationml/2006/main">
   <p:cSld>
     <p:bg>
       <p:bgPr>
@@ -24578,7 +24967,14 @@
         <p:cNvGrpSpPr/>
         <p:nvPr/>
       </p:nvGrpSpPr>
-      <p:grpSpPr/>
+      <p:grpSpPr>
+        <a:xfrm>
+          <a:off x="0" y="0"/>
+          <a:ext cx="0" cy="0"/>
+          <a:chOff x="0" y="0"/>
+          <a:chExt cx="0" cy="0"/>
+        </a:xfrm>
+      </p:grpSpPr>
       <p:sp>
         <p:nvSpPr>
           <p:cNvPr id="2" name="Rectangle 1"/>
@@ -24619,6 +25015,7 @@
           <a:lstStyle/>
           <a:p>
             <a:pPr algn="ctr"/>
+            <a:endParaRPr/>
           </a:p>
         </p:txBody>
       </p:sp>
@@ -24662,6 +25059,7 @@
           <a:lstStyle/>
           <a:p>
             <a:pPr algn="ctr"/>
+            <a:endParaRPr/>
           </a:p>
         </p:txBody>
       </p:sp>
@@ -24807,6 +25205,7 @@
           <a:lstStyle/>
           <a:p>
             <a:pPr algn="ctr"/>
+            <a:endParaRPr/>
           </a:p>
         </p:txBody>
       </p:sp>
@@ -24884,6 +25283,7 @@
           <a:lstStyle/>
           <a:p>
             <a:pPr algn="ctr"/>
+            <a:endParaRPr/>
           </a:p>
         </p:txBody>
       </p:sp>
@@ -24927,6 +25327,7 @@
           <a:lstStyle/>
           <a:p>
             <a:pPr algn="ctr"/>
+            <a:endParaRPr/>
           </a:p>
         </p:txBody>
       </p:sp>
@@ -24972,7 +25373,7 @@
         </p:nvSpPr>
         <p:spPr>
           <a:xfrm>
-            <a:off x="-198000" y="1558800"/>
+            <a:off x="14834" y="1591200"/>
             <a:ext cx="1116000" cy="1872000"/>
           </a:xfrm>
           <a:prstGeom prst="rect">
@@ -25006,6 +25407,7 @@
           <a:lstStyle/>
           <a:p>
             <a:pPr algn="ctr"/>
+            <a:endParaRPr/>
           </a:p>
         </p:txBody>
       </p:sp>
@@ -25017,8 +25419,8 @@
         </p:nvSpPr>
         <p:spPr>
           <a:xfrm>
-            <a:off x="-198000" y="1558800"/>
-            <a:ext cx="1116000" cy="79200"/>
+            <a:off x="0" y="1519200"/>
+            <a:ext cx="1130834" cy="86400"/>
           </a:xfrm>
           <a:prstGeom prst="rect">
             <a:avLst/>
@@ -25049,6 +25451,7 @@
           <a:lstStyle/>
           <a:p>
             <a:pPr algn="ctr"/>
+            <a:endParaRPr/>
           </a:p>
         </p:txBody>
       </p:sp>
@@ -25060,7 +25463,7 @@
         </p:nvSpPr>
         <p:spPr>
           <a:xfrm>
-            <a:off x="-133200" y="1666800"/>
+            <a:off x="0" y="1677600"/>
             <a:ext cx="1000800" cy="198000"/>
           </a:xfrm>
           <a:prstGeom prst="rect">
@@ -25076,7 +25479,7 @@
           <a:p>
             <a:pPr algn="ctr"/>
             <a:r>
-              <a:rPr sz="800" b="1" i="0">
+              <a:rPr sz="800" b="1" i="0" dirty="0">
                 <a:solidFill>
                   <a:srgbClr val="D4AF37"/>
                 </a:solidFill>
@@ -25094,7 +25497,7 @@
         </p:nvSpPr>
         <p:spPr>
           <a:xfrm>
-            <a:off x="-133200" y="1875600"/>
+            <a:off x="26436" y="1885965"/>
             <a:ext cx="1000800" cy="486000"/>
           </a:xfrm>
           <a:prstGeom prst="rect">
@@ -25110,14 +25513,35 @@
           <a:p>
             <a:pPr algn="ctr"/>
             <a:r>
-              <a:rPr sz="1100" b="1" i="0">
+              <a:rPr sz="1100" b="1" i="0" dirty="0" err="1">
                 <a:solidFill>
                   <a:srgbClr val="FFFFFF"/>
                 </a:solidFill>
               </a:rPr>
-              <a:t>Lancement
-Yaoundé+Douala</a:t>
-            </a:r>
+              <a:t>Lancement</a:t>
+            </a:r>
+            <a:r>
+              <a:rPr sz="1100" b="1" i="0" dirty="0">
+                <a:solidFill>
+                  <a:srgbClr val="FFFFFF"/>
+                </a:solidFill>
+              </a:rPr>
+              <a:t>
+</a:t>
+            </a:r>
+            <a:r>
+              <a:rPr sz="1100" b="1" i="0" dirty="0" err="1">
+                <a:solidFill>
+                  <a:srgbClr val="FFFFFF"/>
+                </a:solidFill>
+              </a:rPr>
+              <a:t>Yaoundé+Douala</a:t>
+            </a:r>
+            <a:endParaRPr sz="1100" b="1" i="0" dirty="0">
+              <a:solidFill>
+                <a:srgbClr val="FFFFFF"/>
+              </a:solidFill>
+            </a:endParaRPr>
           </a:p>
         </p:txBody>
       </p:sp>
@@ -25129,7 +25553,7 @@
         </p:nvSpPr>
         <p:spPr>
           <a:xfrm>
-            <a:off x="-133200" y="2379599"/>
+            <a:off x="-11060" y="2457000"/>
             <a:ext cx="1000800" cy="990000"/>
           </a:xfrm>
           <a:prstGeom prst="rect">
@@ -25145,14 +25569,27 @@
           <a:p>
             <a:pPr algn="ctr"/>
             <a:r>
-              <a:rPr sz="900" b="0" i="0">
+              <a:rPr sz="900" b="0" i="0" dirty="0">
                 <a:solidFill>
                   <a:srgbClr val="B0C4DE"/>
                 </a:solidFill>
               </a:rPr>
               <a:t>9 services + Bourse
-du Livre actifs</a:t>
-            </a:r>
+du Livre </a:t>
+            </a:r>
+            <a:r>
+              <a:rPr sz="900" b="0" i="0" dirty="0" err="1">
+                <a:solidFill>
+                  <a:srgbClr val="B0C4DE"/>
+                </a:solidFill>
+              </a:rPr>
+              <a:t>actifs</a:t>
+            </a:r>
+            <a:endParaRPr sz="900" b="0" i="0" dirty="0">
+              <a:solidFill>
+                <a:srgbClr val="B0C4DE"/>
+              </a:solidFill>
+            </a:endParaRPr>
           </a:p>
         </p:txBody>
       </p:sp>
@@ -25196,6 +25633,7 @@
           <a:lstStyle/>
           <a:p>
             <a:pPr algn="ctr"/>
+            <a:endParaRPr/>
           </a:p>
         </p:txBody>
       </p:sp>
@@ -25275,6 +25713,7 @@
           <a:lstStyle/>
           <a:p>
             <a:pPr algn="ctr"/>
+            <a:endParaRPr/>
           </a:p>
         </p:txBody>
       </p:sp>
@@ -25318,6 +25757,7 @@
           <a:lstStyle/>
           <a:p>
             <a:pPr algn="ctr"/>
+            <a:endParaRPr/>
           </a:p>
         </p:txBody>
       </p:sp>
@@ -25465,6 +25905,7 @@
           <a:lstStyle/>
           <a:p>
             <a:pPr algn="ctr"/>
+            <a:endParaRPr/>
           </a:p>
         </p:txBody>
       </p:sp>
@@ -25544,6 +25985,7 @@
           <a:lstStyle/>
           <a:p>
             <a:pPr algn="ctr"/>
+            <a:endParaRPr/>
           </a:p>
         </p:txBody>
       </p:sp>
@@ -25587,6 +26029,7 @@
           <a:lstStyle/>
           <a:p>
             <a:pPr algn="ctr"/>
+            <a:endParaRPr/>
           </a:p>
         </p:txBody>
       </p:sp>
@@ -25734,6 +26177,7 @@
           <a:lstStyle/>
           <a:p>
             <a:pPr algn="ctr"/>
+            <a:endParaRPr/>
           </a:p>
         </p:txBody>
       </p:sp>
@@ -25813,6 +26257,7 @@
           <a:lstStyle/>
           <a:p>
             <a:pPr algn="ctr"/>
+            <a:endParaRPr/>
           </a:p>
         </p:txBody>
       </p:sp>
@@ -25856,6 +26301,7 @@
           <a:lstStyle/>
           <a:p>
             <a:pPr algn="ctr"/>
+            <a:endParaRPr/>
           </a:p>
         </p:txBody>
       </p:sp>
@@ -26003,6 +26449,7 @@
           <a:lstStyle/>
           <a:p>
             <a:pPr algn="ctr"/>
+            <a:endParaRPr/>
           </a:p>
         </p:txBody>
       </p:sp>
@@ -26082,6 +26529,7 @@
           <a:lstStyle/>
           <a:p>
             <a:pPr algn="ctr"/>
+            <a:endParaRPr/>
           </a:p>
         </p:txBody>
       </p:sp>
@@ -26125,6 +26573,7 @@
           <a:lstStyle/>
           <a:p>
             <a:pPr algn="ctr"/>
+            <a:endParaRPr/>
           </a:p>
         </p:txBody>
       </p:sp>
@@ -26272,6 +26721,7 @@
           <a:lstStyle/>
           <a:p>
             <a:pPr algn="ctr"/>
+            <a:endParaRPr/>
           </a:p>
         </p:txBody>
       </p:sp>
@@ -26351,6 +26801,7 @@
           <a:lstStyle/>
           <a:p>
             <a:pPr algn="ctr"/>
+            <a:endParaRPr/>
           </a:p>
         </p:txBody>
       </p:sp>
@@ -26394,6 +26845,7 @@
           <a:lstStyle/>
           <a:p>
             <a:pPr algn="ctr"/>
+            <a:endParaRPr/>
           </a:p>
         </p:txBody>
       </p:sp>
@@ -26541,6 +26993,7 @@
           <a:lstStyle/>
           <a:p>
             <a:pPr algn="ctr"/>
+            <a:endParaRPr/>
           </a:p>
         </p:txBody>
       </p:sp>
@@ -26586,8 +27039,8 @@
         </p:nvSpPr>
         <p:spPr>
           <a:xfrm>
-            <a:off x="8226000" y="1558800"/>
-            <a:ext cx="1116000" cy="1872000"/>
+            <a:off x="8021928" y="1580400"/>
+            <a:ext cx="1122072" cy="1872000"/>
           </a:xfrm>
           <a:prstGeom prst="rect">
             <a:avLst/>
@@ -26620,6 +27073,7 @@
           <a:lstStyle/>
           <a:p>
             <a:pPr algn="ctr"/>
+            <a:endParaRPr/>
           </a:p>
         </p:txBody>
       </p:sp>
@@ -26631,7 +27085,7 @@
         </p:nvSpPr>
         <p:spPr>
           <a:xfrm>
-            <a:off x="8226000" y="1558800"/>
+            <a:off x="8021928" y="1549322"/>
             <a:ext cx="1116000" cy="79200"/>
           </a:xfrm>
           <a:prstGeom prst="rect">
@@ -26663,6 +27117,7 @@
           <a:lstStyle/>
           <a:p>
             <a:pPr algn="ctr"/>
+            <a:endParaRPr/>
           </a:p>
         </p:txBody>
       </p:sp>
@@ -26674,7 +27129,7 @@
         </p:nvSpPr>
         <p:spPr>
           <a:xfrm>
-            <a:off x="8290800" y="1666800"/>
+            <a:off x="8182105" y="1666800"/>
             <a:ext cx="1000800" cy="198000"/>
           </a:xfrm>
           <a:prstGeom prst="rect">
@@ -26708,7 +27163,7 @@
         </p:nvSpPr>
         <p:spPr>
           <a:xfrm>
-            <a:off x="8290800" y="1875600"/>
+            <a:off x="8156428" y="1885965"/>
             <a:ext cx="1000800" cy="486000"/>
           </a:xfrm>
           <a:prstGeom prst="rect">
@@ -26724,7 +27179,7 @@
           <a:p>
             <a:pPr algn="ctr"/>
             <a:r>
-              <a:rPr sz="1100" b="1" i="0">
+              <a:rPr sz="1100" b="1" i="0" dirty="0">
                 <a:solidFill>
                   <a:srgbClr val="FFFFFF"/>
                 </a:solidFill>
@@ -26743,7 +27198,7 @@
         </p:nvSpPr>
         <p:spPr>
           <a:xfrm>
-            <a:off x="8290800" y="2379599"/>
+            <a:off x="8137128" y="2365199"/>
             <a:ext cx="1000800" cy="990000"/>
           </a:xfrm>
           <a:prstGeom prst="rect">
@@ -26759,13 +27214,29 @@
           <a:p>
             <a:pPr algn="ctr"/>
             <a:r>
-              <a:rPr sz="900" b="0" i="0">
+              <a:rPr sz="900" b="0" i="0" dirty="0">
                 <a:solidFill>
                   <a:srgbClr val="B0C4DE"/>
                 </a:solidFill>
               </a:rPr>
               <a:t>Dakar + leadership
-pan-africain 2030</a:t>
+pan-</a:t>
+            </a:r>
+            <a:r>
+              <a:rPr sz="900" b="0" i="0" dirty="0" err="1">
+                <a:solidFill>
+                  <a:srgbClr val="B0C4DE"/>
+                </a:solidFill>
+              </a:rPr>
+              <a:t>africain</a:t>
+            </a:r>
+            <a:r>
+              <a:rPr sz="900" b="0" i="0" dirty="0">
+                <a:solidFill>
+                  <a:srgbClr val="B0C4DE"/>
+                </a:solidFill>
+              </a:rPr>
+              <a:t> 2030</a:t>
             </a:r>
           </a:p>
         </p:txBody>
@@ -26779,7 +27250,7 @@
 </file>
 
 <file path=ppt/slides/slide18.xml><?xml version="1.0" encoding="utf-8"?>
-<p:sld xmlns:a="http://schemas.openxmlformats.org/drawingml/2006/main" xmlns:p="http://schemas.openxmlformats.org/presentationml/2006/main" xmlns:r="http://schemas.openxmlformats.org/officeDocument/2006/relationships">
+<p:sld xmlns:a="http://schemas.openxmlformats.org/drawingml/2006/main" xmlns:r="http://schemas.openxmlformats.org/officeDocument/2006/relationships" xmlns:p="http://schemas.openxmlformats.org/presentationml/2006/main">
   <p:cSld>
     <p:bg>
       <p:bgPr>
@@ -26795,7 +27266,14 @@
         <p:cNvGrpSpPr/>
         <p:nvPr/>
       </p:nvGrpSpPr>
-      <p:grpSpPr/>
+      <p:grpSpPr>
+        <a:xfrm>
+          <a:off x="0" y="0"/>
+          <a:ext cx="0" cy="0"/>
+          <a:chOff x="0" y="0"/>
+          <a:chExt cx="0" cy="0"/>
+        </a:xfrm>
+      </p:grpSpPr>
       <p:sp>
         <p:nvSpPr>
           <p:cNvPr id="2" name="Rectangle 1"/>
@@ -26836,6 +27314,7 @@
           <a:lstStyle/>
           <a:p>
             <a:pPr algn="ctr"/>
+            <a:endParaRPr/>
           </a:p>
         </p:txBody>
       </p:sp>
@@ -26879,6 +27358,7 @@
           <a:lstStyle/>
           <a:p>
             <a:pPr algn="ctr"/>
+            <a:endParaRPr/>
           </a:p>
         </p:txBody>
       </p:sp>
@@ -26922,6 +27402,7 @@
           <a:lstStyle/>
           <a:p>
             <a:pPr algn="ctr"/>
+            <a:endParaRPr/>
           </a:p>
         </p:txBody>
       </p:sp>
@@ -26965,6 +27446,7 @@
           <a:lstStyle/>
           <a:p>
             <a:pPr algn="ctr"/>
+            <a:endParaRPr/>
           </a:p>
         </p:txBody>
       </p:sp>
@@ -27008,6 +27490,7 @@
           <a:lstStyle/>
           <a:p>
             <a:pPr algn="ctr"/>
+            <a:endParaRPr/>
           </a:p>
         </p:txBody>
       </p:sp>
@@ -27109,6 +27592,7 @@
           <a:lstStyle/>
           <a:p>
             <a:pPr algn="ctr"/>
+            <a:endParaRPr/>
           </a:p>
         </p:txBody>
       </p:sp>
@@ -27188,6 +27672,7 @@
           <a:lstStyle/>
           <a:p>
             <a:pPr algn="ctr"/>
+            <a:endParaRPr/>
           </a:p>
         </p:txBody>
       </p:sp>
@@ -27231,6 +27716,7 @@
           <a:lstStyle/>
           <a:p>
             <a:pPr algn="ctr"/>
+            <a:endParaRPr/>
           </a:p>
         </p:txBody>
       </p:sp>
@@ -27277,28 +27763,41 @@
         <p:spPr>
           <a:xfrm>
             <a:off x="600000" y="2952000"/>
-            <a:ext cx="3654000" cy="594000"/>
-          </a:xfrm>
-          <a:prstGeom prst="rect">
-            <a:avLst/>
-          </a:prstGeom>
-          <a:noFill/>
-        </p:spPr>
-        <p:txBody>
-          <a:bodyPr wrap="square">
-            <a:spAutoFit/>
-          </a:bodyPr>
-          <a:lstStyle/>
-          <a:p>
-            <a:pPr algn="ctr"/>
-            <a:r>
-              <a:rPr sz="1400" b="1" i="0">
+            <a:ext cx="3654000" cy="307777"/>
+          </a:xfrm>
+          <a:prstGeom prst="rect">
+            <a:avLst/>
+          </a:prstGeom>
+          <a:noFill/>
+        </p:spPr>
+        <p:txBody>
+          <a:bodyPr wrap="square">
+            <a:spAutoFit/>
+          </a:bodyPr>
+          <a:lstStyle/>
+          <a:p>
+            <a:pPr algn="ctr"/>
+            <a:r>
+              <a:rPr sz="1400" b="1" i="0" dirty="0">
                 <a:solidFill>
                   <a:srgbClr val="FFFFFF"/>
                 </a:solidFill>
               </a:rPr>
-              <a:t>lelehernandez2007@gmail.com</a:t>
-            </a:r>
+              <a:t>lelehernandez2007@</a:t>
+            </a:r>
+            <a:r>
+              <a:rPr lang="fr-FR" sz="1400" b="1" dirty="0">
+                <a:solidFill>
+                  <a:srgbClr val="FFFFFF"/>
+                </a:solidFill>
+              </a:rPr>
+              <a:t>yahoo.fr</a:t>
+            </a:r>
+            <a:endParaRPr sz="1400" b="1" i="0" dirty="0">
+              <a:solidFill>
+                <a:srgbClr val="FFFFFF"/>
+              </a:solidFill>
+            </a:endParaRPr>
           </a:p>
         </p:txBody>
       </p:sp>
@@ -27344,6 +27843,7 @@
           <a:lstStyle/>
           <a:p>
             <a:pPr algn="ctr"/>
+            <a:endParaRPr/>
           </a:p>
         </p:txBody>
       </p:sp>
@@ -27387,6 +27887,7 @@
           <a:lstStyle/>
           <a:p>
             <a:pPr algn="ctr"/>
+            <a:endParaRPr/>
           </a:p>
         </p:txBody>
       </p:sp>
@@ -27500,6 +28001,7 @@
           <a:lstStyle/>
           <a:p>
             <a:pPr algn="ctr"/>
+            <a:endParaRPr/>
           </a:p>
         </p:txBody>
       </p:sp>
@@ -27543,6 +28045,7 @@
           <a:lstStyle/>
           <a:p>
             <a:pPr algn="ctr"/>
+            <a:endParaRPr/>
           </a:p>
         </p:txBody>
       </p:sp>
@@ -27656,6 +28159,7 @@
           <a:lstStyle/>
           <a:p>
             <a:pPr algn="ctr"/>
+            <a:endParaRPr/>
           </a:p>
         </p:txBody>
       </p:sp>
@@ -27699,6 +28203,7 @@
           <a:lstStyle/>
           <a:p>
             <a:pPr algn="ctr"/>
+            <a:endParaRPr/>
           </a:p>
         </p:txBody>
       </p:sp>
@@ -27745,27 +28250,35 @@
         <p:spPr>
           <a:xfrm>
             <a:off x="4944000" y="4140000"/>
-            <a:ext cx="3654000" cy="594000"/>
-          </a:xfrm>
-          <a:prstGeom prst="rect">
-            <a:avLst/>
-          </a:prstGeom>
-          <a:noFill/>
-        </p:spPr>
-        <p:txBody>
-          <a:bodyPr wrap="square">
-            <a:spAutoFit/>
-          </a:bodyPr>
-          <a:lstStyle/>
-          <a:p>
-            <a:pPr algn="ctr"/>
-            <a:r>
-              <a:rPr sz="1400" b="1" i="0">
+            <a:ext cx="3654000" cy="307777"/>
+          </a:xfrm>
+          <a:prstGeom prst="rect">
+            <a:avLst/>
+          </a:prstGeom>
+          <a:noFill/>
+        </p:spPr>
+        <p:txBody>
+          <a:bodyPr wrap="square">
+            <a:spAutoFit/>
+          </a:bodyPr>
+          <a:lstStyle/>
+          <a:p>
+            <a:pPr algn="ctr"/>
+            <a:r>
+              <a:rPr lang="fr-FR" sz="1400" b="1" i="0" dirty="0">
                 <a:solidFill>
                   <a:srgbClr val="FFFFFF"/>
                 </a:solidFill>
               </a:rPr>
-              <a:t>Yaoundé, Cameroun</a:t>
+              <a:t>Douala</a:t>
+            </a:r>
+            <a:r>
+              <a:rPr sz="1400" b="1" i="0" dirty="0">
+                <a:solidFill>
+                  <a:srgbClr val="FFFFFF"/>
+                </a:solidFill>
+              </a:rPr>
+              <a:t>, Cameroun</a:t>
             </a:r>
           </a:p>
         </p:txBody>
@@ -27847,7 +28360,7 @@
 </file>
 
 <file path=ppt/slides/slide2.xml><?xml version="1.0" encoding="utf-8"?>
-<p:sld xmlns:a="http://schemas.openxmlformats.org/drawingml/2006/main" xmlns:p="http://schemas.openxmlformats.org/presentationml/2006/main" xmlns:r="http://schemas.openxmlformats.org/officeDocument/2006/relationships">
+<p:sld xmlns:a="http://schemas.openxmlformats.org/drawingml/2006/main" xmlns:r="http://schemas.openxmlformats.org/officeDocument/2006/relationships" xmlns:p="http://schemas.openxmlformats.org/presentationml/2006/main">
   <p:cSld>
     <p:bg>
       <p:bgPr>
@@ -27863,7 +28376,14 @@
         <p:cNvGrpSpPr/>
         <p:nvPr/>
       </p:nvGrpSpPr>
-      <p:grpSpPr/>
+      <p:grpSpPr>
+        <a:xfrm>
+          <a:off x="0" y="0"/>
+          <a:ext cx="0" cy="0"/>
+          <a:chOff x="0" y="0"/>
+          <a:chExt cx="0" cy="0"/>
+        </a:xfrm>
+      </p:grpSpPr>
       <p:sp>
         <p:nvSpPr>
           <p:cNvPr id="2" name="Rectangle 1"/>
@@ -27904,6 +28424,7 @@
           <a:lstStyle/>
           <a:p>
             <a:pPr algn="ctr"/>
+            <a:endParaRPr/>
           </a:p>
         </p:txBody>
       </p:sp>
@@ -27947,6 +28468,7 @@
           <a:lstStyle/>
           <a:p>
             <a:pPr algn="ctr"/>
+            <a:endParaRPr/>
           </a:p>
         </p:txBody>
       </p:sp>
@@ -28092,6 +28614,7 @@
           <a:lstStyle/>
           <a:p>
             <a:pPr algn="ctr"/>
+            <a:endParaRPr/>
           </a:p>
         </p:txBody>
       </p:sp>
@@ -28171,6 +28694,7 @@
           <a:lstStyle/>
           <a:p>
             <a:pPr algn="ctr"/>
+            <a:endParaRPr/>
           </a:p>
         </p:txBody>
       </p:sp>
@@ -28214,6 +28738,7 @@
           <a:lstStyle/>
           <a:p>
             <a:pPr algn="ctr"/>
+            <a:endParaRPr/>
           </a:p>
         </p:txBody>
       </p:sp>
@@ -28328,6 +28853,7 @@
           <a:lstStyle/>
           <a:p>
             <a:pPr algn="ctr"/>
+            <a:endParaRPr/>
           </a:p>
         </p:txBody>
       </p:sp>
@@ -28371,6 +28897,7 @@
           <a:lstStyle/>
           <a:p>
             <a:pPr algn="ctr"/>
+            <a:endParaRPr/>
           </a:p>
         </p:txBody>
       </p:sp>
@@ -28485,6 +29012,7 @@
           <a:lstStyle/>
           <a:p>
             <a:pPr algn="ctr"/>
+            <a:endParaRPr/>
           </a:p>
         </p:txBody>
       </p:sp>
@@ -28528,6 +29056,7 @@
           <a:lstStyle/>
           <a:p>
             <a:pPr algn="ctr"/>
+            <a:endParaRPr/>
           </a:p>
         </p:txBody>
       </p:sp>
@@ -28642,6 +29171,7 @@
           <a:lstStyle/>
           <a:p>
             <a:pPr algn="ctr"/>
+            <a:endParaRPr/>
           </a:p>
         </p:txBody>
       </p:sp>
@@ -28685,6 +29215,7 @@
           <a:lstStyle/>
           <a:p>
             <a:pPr algn="ctr"/>
+            <a:endParaRPr/>
           </a:p>
         </p:txBody>
       </p:sp>
@@ -28797,6 +29328,7 @@
           <a:lstStyle/>
           <a:p>
             <a:pPr algn="ctr"/>
+            <a:endParaRPr/>
           </a:p>
         </p:txBody>
       </p:sp>
@@ -28840,6 +29372,7 @@
           <a:lstStyle/>
           <a:p>
             <a:pPr algn="ctr"/>
+            <a:endParaRPr/>
           </a:p>
         </p:txBody>
       </p:sp>
@@ -28917,6 +29450,7 @@
           <a:lstStyle/>
           <a:p>
             <a:pPr algn="ctr"/>
+            <a:endParaRPr/>
           </a:p>
         </p:txBody>
       </p:sp>
@@ -28994,6 +29528,7 @@
           <a:lstStyle/>
           <a:p>
             <a:pPr algn="ctr"/>
+            <a:endParaRPr/>
           </a:p>
         </p:txBody>
       </p:sp>
@@ -29071,6 +29606,7 @@
           <a:lstStyle/>
           <a:p>
             <a:pPr algn="ctr"/>
+            <a:endParaRPr/>
           </a:p>
         </p:txBody>
       </p:sp>
@@ -29184,6 +29720,7 @@
           <a:lstStyle/>
           <a:p>
             <a:pPr algn="ctr"/>
+            <a:endParaRPr/>
           </a:p>
         </p:txBody>
       </p:sp>
@@ -29227,6 +29764,7 @@
           <a:lstStyle/>
           <a:p>
             <a:pPr algn="ctr"/>
+            <a:endParaRPr/>
           </a:p>
         </p:txBody>
       </p:sp>
@@ -29273,7 +29811,7 @@
 </file>
 
 <file path=ppt/slides/slide3.xml><?xml version="1.0" encoding="utf-8"?>
-<p:sld xmlns:a="http://schemas.openxmlformats.org/drawingml/2006/main" xmlns:p="http://schemas.openxmlformats.org/presentationml/2006/main" xmlns:r="http://schemas.openxmlformats.org/officeDocument/2006/relationships">
+<p:sld xmlns:a="http://schemas.openxmlformats.org/drawingml/2006/main" xmlns:r="http://schemas.openxmlformats.org/officeDocument/2006/relationships" xmlns:p="http://schemas.openxmlformats.org/presentationml/2006/main">
   <p:cSld>
     <p:bg>
       <p:bgPr>
@@ -29289,7 +29827,14 @@
         <p:cNvGrpSpPr/>
         <p:nvPr/>
       </p:nvGrpSpPr>
-      <p:grpSpPr/>
+      <p:grpSpPr>
+        <a:xfrm>
+          <a:off x="0" y="0"/>
+          <a:ext cx="0" cy="0"/>
+          <a:chOff x="0" y="0"/>
+          <a:chExt cx="0" cy="0"/>
+        </a:xfrm>
+      </p:grpSpPr>
       <p:sp>
         <p:nvSpPr>
           <p:cNvPr id="2" name="Rectangle 1"/>
@@ -29330,6 +29875,7 @@
           <a:lstStyle/>
           <a:p>
             <a:pPr algn="ctr"/>
+            <a:endParaRPr/>
           </a:p>
         </p:txBody>
       </p:sp>
@@ -29373,6 +29919,7 @@
           <a:lstStyle/>
           <a:p>
             <a:pPr algn="ctr"/>
+            <a:endParaRPr/>
           </a:p>
         </p:txBody>
       </p:sp>
@@ -29518,6 +30065,7 @@
           <a:lstStyle/>
           <a:p>
             <a:pPr algn="ctr"/>
+            <a:endParaRPr/>
           </a:p>
         </p:txBody>
       </p:sp>
@@ -29597,6 +30145,7 @@
           <a:lstStyle/>
           <a:p>
             <a:pPr algn="ctr"/>
+            <a:endParaRPr/>
           </a:p>
         </p:txBody>
       </p:sp>
@@ -29640,6 +30189,7 @@
           <a:lstStyle/>
           <a:p>
             <a:pPr algn="ctr"/>
+            <a:endParaRPr/>
           </a:p>
         </p:txBody>
       </p:sp>
@@ -29717,6 +30267,7 @@
           <a:lstStyle/>
           <a:p>
             <a:pPr algn="ctr"/>
+            <a:endParaRPr/>
           </a:p>
         </p:txBody>
       </p:sp>
@@ -29798,6 +30349,7 @@
           <a:lstStyle/>
           <a:p>
             <a:pPr algn="ctr"/>
+            <a:endParaRPr/>
           </a:p>
         </p:txBody>
       </p:sp>
@@ -29841,6 +30393,7 @@
           <a:lstStyle/>
           <a:p>
             <a:pPr algn="ctr"/>
+            <a:endParaRPr/>
           </a:p>
         </p:txBody>
       </p:sp>
@@ -29918,6 +30471,7 @@
           <a:lstStyle/>
           <a:p>
             <a:pPr algn="ctr"/>
+            <a:endParaRPr/>
           </a:p>
         </p:txBody>
       </p:sp>
@@ -29999,6 +30553,7 @@
           <a:lstStyle/>
           <a:p>
             <a:pPr algn="ctr"/>
+            <a:endParaRPr/>
           </a:p>
         </p:txBody>
       </p:sp>
@@ -30042,6 +30597,7 @@
           <a:lstStyle/>
           <a:p>
             <a:pPr algn="ctr"/>
+            <a:endParaRPr/>
           </a:p>
         </p:txBody>
       </p:sp>
@@ -30119,6 +30675,7 @@
           <a:lstStyle/>
           <a:p>
             <a:pPr algn="ctr"/>
+            <a:endParaRPr/>
           </a:p>
         </p:txBody>
       </p:sp>
@@ -30167,7 +30724,7 @@
 </file>
 
 <file path=ppt/slides/slide4.xml><?xml version="1.0" encoding="utf-8"?>
-<p:sld xmlns:a="http://schemas.openxmlformats.org/drawingml/2006/main" xmlns:p="http://schemas.openxmlformats.org/presentationml/2006/main" xmlns:r="http://schemas.openxmlformats.org/officeDocument/2006/relationships">
+<p:sld xmlns:a="http://schemas.openxmlformats.org/drawingml/2006/main" xmlns:r="http://schemas.openxmlformats.org/officeDocument/2006/relationships" xmlns:p="http://schemas.openxmlformats.org/presentationml/2006/main">
   <p:cSld>
     <p:bg>
       <p:bgPr>
@@ -30183,7 +30740,14 @@
         <p:cNvGrpSpPr/>
         <p:nvPr/>
       </p:nvGrpSpPr>
-      <p:grpSpPr/>
+      <p:grpSpPr>
+        <a:xfrm>
+          <a:off x="0" y="0"/>
+          <a:ext cx="0" cy="0"/>
+          <a:chOff x="0" y="0"/>
+          <a:chExt cx="0" cy="0"/>
+        </a:xfrm>
+      </p:grpSpPr>
       <p:sp>
         <p:nvSpPr>
           <p:cNvPr id="2" name="Rectangle 1"/>
@@ -30224,6 +30788,7 @@
           <a:lstStyle/>
           <a:p>
             <a:pPr algn="ctr"/>
+            <a:endParaRPr/>
           </a:p>
         </p:txBody>
       </p:sp>
@@ -30267,6 +30832,7 @@
           <a:lstStyle/>
           <a:p>
             <a:pPr algn="ctr"/>
+            <a:endParaRPr/>
           </a:p>
         </p:txBody>
       </p:sp>
@@ -30412,6 +30978,7 @@
           <a:lstStyle/>
           <a:p>
             <a:pPr algn="ctr"/>
+            <a:endParaRPr/>
           </a:p>
         </p:txBody>
       </p:sp>
@@ -30489,6 +31056,7 @@
           <a:lstStyle/>
           <a:p>
             <a:pPr algn="ctr"/>
+            <a:endParaRPr/>
           </a:p>
         </p:txBody>
       </p:sp>
@@ -30532,6 +31100,7 @@
           <a:lstStyle/>
           <a:p>
             <a:pPr algn="ctr"/>
+            <a:endParaRPr/>
           </a:p>
         </p:txBody>
       </p:sp>
@@ -30643,6 +31212,7 @@
           <a:lstStyle/>
           <a:p>
             <a:pPr algn="ctr"/>
+            <a:endParaRPr/>
           </a:p>
         </p:txBody>
       </p:sp>
@@ -30686,6 +31256,7 @@
           <a:lstStyle/>
           <a:p>
             <a:pPr algn="ctr"/>
+            <a:endParaRPr/>
           </a:p>
         </p:txBody>
       </p:sp>
@@ -30797,6 +31368,7 @@
           <a:lstStyle/>
           <a:p>
             <a:pPr algn="ctr"/>
+            <a:endParaRPr/>
           </a:p>
         </p:txBody>
       </p:sp>
@@ -30840,6 +31412,7 @@
           <a:lstStyle/>
           <a:p>
             <a:pPr algn="ctr"/>
+            <a:endParaRPr/>
           </a:p>
         </p:txBody>
       </p:sp>
@@ -30951,6 +31524,7 @@
           <a:lstStyle/>
           <a:p>
             <a:pPr algn="ctr"/>
+            <a:endParaRPr/>
           </a:p>
         </p:txBody>
       </p:sp>
@@ -30994,6 +31568,7 @@
           <a:lstStyle/>
           <a:p>
             <a:pPr algn="ctr"/>
+            <a:endParaRPr/>
           </a:p>
         </p:txBody>
       </p:sp>
@@ -31105,6 +31680,7 @@
           <a:lstStyle/>
           <a:p>
             <a:pPr algn="ctr"/>
+            <a:endParaRPr/>
           </a:p>
         </p:txBody>
       </p:sp>
@@ -31148,6 +31724,7 @@
           <a:lstStyle/>
           <a:p>
             <a:pPr algn="ctr"/>
+            <a:endParaRPr/>
           </a:p>
         </p:txBody>
       </p:sp>
@@ -31259,6 +31836,7 @@
           <a:lstStyle/>
           <a:p>
             <a:pPr algn="ctr"/>
+            <a:endParaRPr/>
           </a:p>
         </p:txBody>
       </p:sp>
@@ -31302,6 +31880,7 @@
           <a:lstStyle/>
           <a:p>
             <a:pPr algn="ctr"/>
+            <a:endParaRPr/>
           </a:p>
         </p:txBody>
       </p:sp>
@@ -31413,6 +31992,7 @@
           <a:lstStyle/>
           <a:p>
             <a:pPr algn="ctr"/>
+            <a:endParaRPr/>
           </a:p>
         </p:txBody>
       </p:sp>
@@ -31456,6 +32036,7 @@
           <a:lstStyle/>
           <a:p>
             <a:pPr algn="ctr"/>
+            <a:endParaRPr/>
           </a:p>
         </p:txBody>
       </p:sp>
@@ -31567,6 +32148,7 @@
           <a:lstStyle/>
           <a:p>
             <a:pPr algn="ctr"/>
+            <a:endParaRPr/>
           </a:p>
         </p:txBody>
       </p:sp>
@@ -31610,6 +32192,7 @@
           <a:lstStyle/>
           <a:p>
             <a:pPr algn="ctr"/>
+            <a:endParaRPr/>
           </a:p>
         </p:txBody>
       </p:sp>
@@ -31721,6 +32304,7 @@
           <a:lstStyle/>
           <a:p>
             <a:pPr algn="ctr"/>
+            <a:endParaRPr/>
           </a:p>
         </p:txBody>
       </p:sp>
@@ -31764,6 +32348,7 @@
           <a:lstStyle/>
           <a:p>
             <a:pPr algn="ctr"/>
+            <a:endParaRPr/>
           </a:p>
         </p:txBody>
       </p:sp>
@@ -31875,6 +32460,7 @@
           <a:lstStyle/>
           <a:p>
             <a:pPr algn="ctr"/>
+            <a:endParaRPr/>
           </a:p>
         </p:txBody>
       </p:sp>
@@ -31918,6 +32504,7 @@
           <a:lstStyle/>
           <a:p>
             <a:pPr algn="ctr"/>
+            <a:endParaRPr/>
           </a:p>
         </p:txBody>
       </p:sp>
@@ -32029,6 +32616,7 @@
           <a:lstStyle/>
           <a:p>
             <a:pPr algn="ctr"/>
+            <a:endParaRPr/>
           </a:p>
         </p:txBody>
       </p:sp>
@@ -32072,6 +32660,7 @@
           <a:lstStyle/>
           <a:p>
             <a:pPr algn="ctr"/>
+            <a:endParaRPr/>
           </a:p>
         </p:txBody>
       </p:sp>
@@ -32183,6 +32772,7 @@
           <a:lstStyle/>
           <a:p>
             <a:pPr algn="ctr"/>
+            <a:endParaRPr/>
           </a:p>
         </p:txBody>
       </p:sp>
@@ -32226,6 +32816,7 @@
           <a:lstStyle/>
           <a:p>
             <a:pPr algn="ctr"/>
+            <a:endParaRPr/>
           </a:p>
         </p:txBody>
       </p:sp>
@@ -32306,7 +32897,7 @@
 </file>
 
 <file path=ppt/slides/slide5.xml><?xml version="1.0" encoding="utf-8"?>
-<p:sld xmlns:a="http://schemas.openxmlformats.org/drawingml/2006/main" xmlns:p="http://schemas.openxmlformats.org/presentationml/2006/main" xmlns:r="http://schemas.openxmlformats.org/officeDocument/2006/relationships">
+<p:sld xmlns:a="http://schemas.openxmlformats.org/drawingml/2006/main" xmlns:r="http://schemas.openxmlformats.org/officeDocument/2006/relationships" xmlns:p="http://schemas.openxmlformats.org/presentationml/2006/main">
   <p:cSld>
     <p:bg>
       <p:bgPr>
@@ -32322,7 +32913,14 @@
         <p:cNvGrpSpPr/>
         <p:nvPr/>
       </p:nvGrpSpPr>
-      <p:grpSpPr/>
+      <p:grpSpPr>
+        <a:xfrm>
+          <a:off x="0" y="0"/>
+          <a:ext cx="0" cy="0"/>
+          <a:chOff x="0" y="0"/>
+          <a:chExt cx="0" cy="0"/>
+        </a:xfrm>
+      </p:grpSpPr>
       <p:sp>
         <p:nvSpPr>
           <p:cNvPr id="2" name="Rectangle 1"/>
@@ -32363,6 +32961,7 @@
           <a:lstStyle/>
           <a:p>
             <a:pPr algn="ctr"/>
+            <a:endParaRPr/>
           </a:p>
         </p:txBody>
       </p:sp>
@@ -32406,6 +33005,7 @@
           <a:lstStyle/>
           <a:p>
             <a:pPr algn="ctr"/>
+            <a:endParaRPr/>
           </a:p>
         </p:txBody>
       </p:sp>
@@ -32551,6 +33151,7 @@
           <a:lstStyle/>
           <a:p>
             <a:pPr algn="ctr"/>
+            <a:endParaRPr/>
           </a:p>
         </p:txBody>
       </p:sp>
@@ -32630,6 +33231,7 @@
           <a:lstStyle/>
           <a:p>
             <a:pPr algn="ctr"/>
+            <a:endParaRPr/>
           </a:p>
         </p:txBody>
       </p:sp>
@@ -32673,6 +33275,7 @@
           <a:lstStyle/>
           <a:p>
             <a:pPr algn="ctr"/>
+            <a:endParaRPr/>
           </a:p>
         </p:txBody>
       </p:sp>
@@ -32785,6 +33388,7 @@
           <a:lstStyle/>
           <a:p>
             <a:pPr algn="ctr"/>
+            <a:endParaRPr/>
           </a:p>
         </p:txBody>
       </p:sp>
@@ -32864,6 +33468,7 @@
           <a:lstStyle/>
           <a:p>
             <a:pPr algn="ctr"/>
+            <a:endParaRPr/>
           </a:p>
         </p:txBody>
       </p:sp>
@@ -32907,6 +33512,7 @@
           <a:lstStyle/>
           <a:p>
             <a:pPr algn="ctr"/>
+            <a:endParaRPr/>
           </a:p>
         </p:txBody>
       </p:sp>
@@ -33019,6 +33625,7 @@
           <a:lstStyle/>
           <a:p>
             <a:pPr algn="ctr"/>
+            <a:endParaRPr/>
           </a:p>
         </p:txBody>
       </p:sp>
@@ -33098,6 +33705,7 @@
           <a:lstStyle/>
           <a:p>
             <a:pPr algn="ctr"/>
+            <a:endParaRPr/>
           </a:p>
         </p:txBody>
       </p:sp>
@@ -33141,6 +33749,7 @@
           <a:lstStyle/>
           <a:p>
             <a:pPr algn="ctr"/>
+            <a:endParaRPr/>
           </a:p>
         </p:txBody>
       </p:sp>
@@ -33253,6 +33862,7 @@
           <a:lstStyle/>
           <a:p>
             <a:pPr algn="ctr"/>
+            <a:endParaRPr/>
           </a:p>
         </p:txBody>
       </p:sp>
@@ -33332,6 +33942,7 @@
           <a:lstStyle/>
           <a:p>
             <a:pPr algn="ctr"/>
+            <a:endParaRPr/>
           </a:p>
         </p:txBody>
       </p:sp>
@@ -33378,7 +33989,7 @@
 </file>
 
 <file path=ppt/slides/slide6.xml><?xml version="1.0" encoding="utf-8"?>
-<p:sld xmlns:a="http://schemas.openxmlformats.org/drawingml/2006/main" xmlns:p="http://schemas.openxmlformats.org/presentationml/2006/main" xmlns:r="http://schemas.openxmlformats.org/officeDocument/2006/relationships">
+<p:sld xmlns:a="http://schemas.openxmlformats.org/drawingml/2006/main" xmlns:r="http://schemas.openxmlformats.org/officeDocument/2006/relationships" xmlns:p="http://schemas.openxmlformats.org/presentationml/2006/main">
   <p:cSld>
     <p:bg>
       <p:bgPr>
@@ -33394,7 +34005,14 @@
         <p:cNvGrpSpPr/>
         <p:nvPr/>
       </p:nvGrpSpPr>
-      <p:grpSpPr/>
+      <p:grpSpPr>
+        <a:xfrm>
+          <a:off x="0" y="0"/>
+          <a:ext cx="0" cy="0"/>
+          <a:chOff x="0" y="0"/>
+          <a:chExt cx="0" cy="0"/>
+        </a:xfrm>
+      </p:grpSpPr>
       <p:sp>
         <p:nvSpPr>
           <p:cNvPr id="2" name="Rectangle 1"/>
@@ -33435,6 +34053,7 @@
           <a:lstStyle/>
           <a:p>
             <a:pPr algn="ctr"/>
+            <a:endParaRPr/>
           </a:p>
         </p:txBody>
       </p:sp>
@@ -33478,6 +34097,7 @@
           <a:lstStyle/>
           <a:p>
             <a:pPr algn="ctr"/>
+            <a:endParaRPr/>
           </a:p>
         </p:txBody>
       </p:sp>
@@ -33623,6 +34243,7 @@
           <a:lstStyle/>
           <a:p>
             <a:pPr algn="ctr"/>
+            <a:endParaRPr/>
           </a:p>
         </p:txBody>
       </p:sp>
@@ -33702,6 +34323,7 @@
           <a:lstStyle/>
           <a:p>
             <a:pPr algn="ctr"/>
+            <a:endParaRPr/>
           </a:p>
         </p:txBody>
       </p:sp>
@@ -33815,6 +34437,7 @@
           <a:lstStyle/>
           <a:p>
             <a:pPr algn="ctr"/>
+            <a:endParaRPr/>
           </a:p>
         </p:txBody>
       </p:sp>
@@ -33928,6 +34551,7 @@
           <a:lstStyle/>
           <a:p>
             <a:pPr algn="ctr"/>
+            <a:endParaRPr/>
           </a:p>
         </p:txBody>
       </p:sp>
@@ -34041,6 +34665,7 @@
           <a:lstStyle/>
           <a:p>
             <a:pPr algn="ctr"/>
+            <a:endParaRPr/>
           </a:p>
         </p:txBody>
       </p:sp>
@@ -34154,6 +34779,7 @@
           <a:lstStyle/>
           <a:p>
             <a:pPr algn="ctr"/>
+            <a:endParaRPr/>
           </a:p>
         </p:txBody>
       </p:sp>
@@ -34265,6 +34891,7 @@
           <a:lstStyle/>
           <a:p>
             <a:pPr algn="ctr"/>
+            <a:endParaRPr/>
           </a:p>
         </p:txBody>
       </p:sp>
@@ -34378,6 +35005,7 @@
           <a:lstStyle/>
           <a:p>
             <a:pPr algn="ctr"/>
+            <a:endParaRPr/>
           </a:p>
         </p:txBody>
       </p:sp>
@@ -34424,7 +35052,7 @@
 </file>
 
 <file path=ppt/slides/slide7.xml><?xml version="1.0" encoding="utf-8"?>
-<p:sld xmlns:a="http://schemas.openxmlformats.org/drawingml/2006/main" xmlns:p="http://schemas.openxmlformats.org/presentationml/2006/main" xmlns:r="http://schemas.openxmlformats.org/officeDocument/2006/relationships">
+<p:sld xmlns:a="http://schemas.openxmlformats.org/drawingml/2006/main" xmlns:r="http://schemas.openxmlformats.org/officeDocument/2006/relationships" xmlns:p="http://schemas.openxmlformats.org/presentationml/2006/main">
   <p:cSld>
     <p:bg>
       <p:bgPr>
@@ -34440,7 +35068,14 @@
         <p:cNvGrpSpPr/>
         <p:nvPr/>
       </p:nvGrpSpPr>
-      <p:grpSpPr/>
+      <p:grpSpPr>
+        <a:xfrm>
+          <a:off x="0" y="0"/>
+          <a:ext cx="0" cy="0"/>
+          <a:chOff x="0" y="0"/>
+          <a:chExt cx="0" cy="0"/>
+        </a:xfrm>
+      </p:grpSpPr>
       <p:sp>
         <p:nvSpPr>
           <p:cNvPr id="2" name="Rectangle 1"/>
@@ -34481,6 +35116,7 @@
           <a:lstStyle/>
           <a:p>
             <a:pPr algn="ctr"/>
+            <a:endParaRPr/>
           </a:p>
         </p:txBody>
       </p:sp>
@@ -34524,6 +35160,7 @@
           <a:lstStyle/>
           <a:p>
             <a:pPr algn="ctr"/>
+            <a:endParaRPr/>
           </a:p>
         </p:txBody>
       </p:sp>
@@ -34669,6 +35306,7 @@
           <a:lstStyle/>
           <a:p>
             <a:pPr algn="ctr"/>
+            <a:endParaRPr/>
           </a:p>
         </p:txBody>
       </p:sp>
@@ -34746,6 +35384,7 @@
           <a:lstStyle/>
           <a:p>
             <a:pPr algn="ctr"/>
+            <a:endParaRPr/>
           </a:p>
         </p:txBody>
       </p:sp>
@@ -34825,6 +35464,7 @@
           <a:lstStyle/>
           <a:p>
             <a:pPr algn="ctr"/>
+            <a:endParaRPr/>
           </a:p>
         </p:txBody>
       </p:sp>
@@ -34904,6 +35544,7 @@
           <a:lstStyle/>
           <a:p>
             <a:pPr algn="ctr"/>
+            <a:endParaRPr/>
           </a:p>
         </p:txBody>
       </p:sp>
@@ -34983,6 +35624,7 @@
           <a:lstStyle/>
           <a:p>
             <a:pPr algn="ctr"/>
+            <a:endParaRPr/>
           </a:p>
         </p:txBody>
       </p:sp>
@@ -35062,6 +35704,7 @@
           <a:lstStyle/>
           <a:p>
             <a:pPr algn="ctr"/>
+            <a:endParaRPr/>
           </a:p>
         </p:txBody>
       </p:sp>
@@ -35139,6 +35782,7 @@
           <a:lstStyle/>
           <a:p>
             <a:pPr algn="ctr"/>
+            <a:endParaRPr/>
           </a:p>
         </p:txBody>
       </p:sp>
@@ -35216,6 +35860,7 @@
           <a:lstStyle/>
           <a:p>
             <a:pPr algn="ctr"/>
+            <a:endParaRPr/>
           </a:p>
         </p:txBody>
       </p:sp>
@@ -35259,6 +35904,7 @@
           <a:lstStyle/>
           <a:p>
             <a:pPr algn="ctr"/>
+            <a:endParaRPr/>
           </a:p>
         </p:txBody>
       </p:sp>
@@ -35336,6 +35982,7 @@
           <a:lstStyle/>
           <a:p>
             <a:pPr algn="ctr"/>
+            <a:endParaRPr/>
           </a:p>
         </p:txBody>
       </p:sp>
@@ -35379,6 +36026,7 @@
           <a:lstStyle/>
           <a:p>
             <a:pPr algn="ctr"/>
+            <a:endParaRPr/>
           </a:p>
         </p:txBody>
       </p:sp>
@@ -35456,6 +36104,7 @@
           <a:lstStyle/>
           <a:p>
             <a:pPr algn="ctr"/>
+            <a:endParaRPr/>
           </a:p>
         </p:txBody>
       </p:sp>
@@ -35499,6 +36148,7 @@
           <a:lstStyle/>
           <a:p>
             <a:pPr algn="ctr"/>
+            <a:endParaRPr/>
           </a:p>
         </p:txBody>
       </p:sp>
@@ -35576,6 +36226,7 @@
           <a:lstStyle/>
           <a:p>
             <a:pPr algn="ctr"/>
+            <a:endParaRPr/>
           </a:p>
         </p:txBody>
       </p:sp>
@@ -35619,6 +36270,7 @@
           <a:lstStyle/>
           <a:p>
             <a:pPr algn="ctr"/>
+            <a:endParaRPr/>
           </a:p>
         </p:txBody>
       </p:sp>
@@ -35696,6 +36348,7 @@
           <a:lstStyle/>
           <a:p>
             <a:pPr algn="ctr"/>
+            <a:endParaRPr/>
           </a:p>
         </p:txBody>
       </p:sp>
@@ -35773,6 +36426,7 @@
           <a:lstStyle/>
           <a:p>
             <a:pPr algn="ctr"/>
+            <a:endParaRPr/>
           </a:p>
         </p:txBody>
       </p:sp>
@@ -35816,6 +36470,7 @@
           <a:lstStyle/>
           <a:p>
             <a:pPr algn="ctr"/>
+            <a:endParaRPr/>
           </a:p>
         </p:txBody>
       </p:sp>
@@ -35893,6 +36548,7 @@
           <a:lstStyle/>
           <a:p>
             <a:pPr algn="ctr"/>
+            <a:endParaRPr/>
           </a:p>
         </p:txBody>
       </p:sp>
@@ -35936,6 +36592,7 @@
           <a:lstStyle/>
           <a:p>
             <a:pPr algn="ctr"/>
+            <a:endParaRPr/>
           </a:p>
         </p:txBody>
       </p:sp>
@@ -36013,6 +36670,7 @@
           <a:lstStyle/>
           <a:p>
             <a:pPr algn="ctr"/>
+            <a:endParaRPr/>
           </a:p>
         </p:txBody>
       </p:sp>
@@ -36056,6 +36714,7 @@
           <a:lstStyle/>
           <a:p>
             <a:pPr algn="ctr"/>
+            <a:endParaRPr/>
           </a:p>
         </p:txBody>
       </p:sp>
@@ -36133,6 +36792,7 @@
           <a:lstStyle/>
           <a:p>
             <a:pPr algn="ctr"/>
+            <a:endParaRPr/>
           </a:p>
         </p:txBody>
       </p:sp>
@@ -36176,6 +36836,7 @@
           <a:lstStyle/>
           <a:p>
             <a:pPr algn="ctr"/>
+            <a:endParaRPr/>
           </a:p>
         </p:txBody>
       </p:sp>
@@ -36253,6 +36914,7 @@
           <a:lstStyle/>
           <a:p>
             <a:pPr algn="ctr"/>
+            <a:endParaRPr/>
           </a:p>
         </p:txBody>
       </p:sp>
@@ -36330,6 +36992,7 @@
           <a:lstStyle/>
           <a:p>
             <a:pPr algn="ctr"/>
+            <a:endParaRPr/>
           </a:p>
         </p:txBody>
       </p:sp>
@@ -36373,6 +37036,7 @@
           <a:lstStyle/>
           <a:p>
             <a:pPr algn="ctr"/>
+            <a:endParaRPr/>
           </a:p>
         </p:txBody>
       </p:sp>
@@ -36450,6 +37114,7 @@
           <a:lstStyle/>
           <a:p>
             <a:pPr algn="ctr"/>
+            <a:endParaRPr/>
           </a:p>
         </p:txBody>
       </p:sp>
@@ -36493,6 +37158,7 @@
           <a:lstStyle/>
           <a:p>
             <a:pPr algn="ctr"/>
+            <a:endParaRPr/>
           </a:p>
         </p:txBody>
       </p:sp>
@@ -36570,6 +37236,7 @@
           <a:lstStyle/>
           <a:p>
             <a:pPr algn="ctr"/>
+            <a:endParaRPr/>
           </a:p>
         </p:txBody>
       </p:sp>
@@ -36613,6 +37280,7 @@
           <a:lstStyle/>
           <a:p>
             <a:pPr algn="ctr"/>
+            <a:endParaRPr/>
           </a:p>
         </p:txBody>
       </p:sp>
@@ -36690,6 +37358,7 @@
           <a:lstStyle/>
           <a:p>
             <a:pPr algn="ctr"/>
+            <a:endParaRPr/>
           </a:p>
         </p:txBody>
       </p:sp>
@@ -36733,6 +37402,7 @@
           <a:lstStyle/>
           <a:p>
             <a:pPr algn="ctr"/>
+            <a:endParaRPr/>
           </a:p>
         </p:txBody>
       </p:sp>
@@ -36810,6 +37480,7 @@
           <a:lstStyle/>
           <a:p>
             <a:pPr algn="ctr"/>
+            <a:endParaRPr/>
           </a:p>
         </p:txBody>
       </p:sp>
@@ -36887,6 +37558,7 @@
           <a:lstStyle/>
           <a:p>
             <a:pPr algn="ctr"/>
+            <a:endParaRPr/>
           </a:p>
         </p:txBody>
       </p:sp>
@@ -36930,6 +37602,7 @@
           <a:lstStyle/>
           <a:p>
             <a:pPr algn="ctr"/>
+            <a:endParaRPr/>
           </a:p>
         </p:txBody>
       </p:sp>
@@ -37007,6 +37680,7 @@
           <a:lstStyle/>
           <a:p>
             <a:pPr algn="ctr"/>
+            <a:endParaRPr/>
           </a:p>
         </p:txBody>
       </p:sp>
@@ -37050,6 +37724,7 @@
           <a:lstStyle/>
           <a:p>
             <a:pPr algn="ctr"/>
+            <a:endParaRPr/>
           </a:p>
         </p:txBody>
       </p:sp>
@@ -37127,6 +37802,7 @@
           <a:lstStyle/>
           <a:p>
             <a:pPr algn="ctr"/>
+            <a:endParaRPr/>
           </a:p>
         </p:txBody>
       </p:sp>
@@ -37170,6 +37846,7 @@
           <a:lstStyle/>
           <a:p>
             <a:pPr algn="ctr"/>
+            <a:endParaRPr/>
           </a:p>
         </p:txBody>
       </p:sp>
@@ -37247,6 +37924,7 @@
           <a:lstStyle/>
           <a:p>
             <a:pPr algn="ctr"/>
+            <a:endParaRPr/>
           </a:p>
         </p:txBody>
       </p:sp>
@@ -37290,6 +37968,7 @@
           <a:lstStyle/>
           <a:p>
             <a:pPr algn="ctr"/>
+            <a:endParaRPr/>
           </a:p>
         </p:txBody>
       </p:sp>
@@ -37367,6 +38046,7 @@
           <a:lstStyle/>
           <a:p>
             <a:pPr algn="ctr"/>
+            <a:endParaRPr/>
           </a:p>
         </p:txBody>
       </p:sp>
@@ -37444,6 +38124,7 @@
           <a:lstStyle/>
           <a:p>
             <a:pPr algn="ctr"/>
+            <a:endParaRPr/>
           </a:p>
         </p:txBody>
       </p:sp>
@@ -37487,6 +38168,7 @@
           <a:lstStyle/>
           <a:p>
             <a:pPr algn="ctr"/>
+            <a:endParaRPr/>
           </a:p>
         </p:txBody>
       </p:sp>
@@ -37564,6 +38246,7 @@
           <a:lstStyle/>
           <a:p>
             <a:pPr algn="ctr"/>
+            <a:endParaRPr/>
           </a:p>
         </p:txBody>
       </p:sp>
@@ -37607,6 +38290,7 @@
           <a:lstStyle/>
           <a:p>
             <a:pPr algn="ctr"/>
+            <a:endParaRPr/>
           </a:p>
         </p:txBody>
       </p:sp>
@@ -37684,6 +38368,7 @@
           <a:lstStyle/>
           <a:p>
             <a:pPr algn="ctr"/>
+            <a:endParaRPr/>
           </a:p>
         </p:txBody>
       </p:sp>
@@ -37727,6 +38412,7 @@
           <a:lstStyle/>
           <a:p>
             <a:pPr algn="ctr"/>
+            <a:endParaRPr/>
           </a:p>
         </p:txBody>
       </p:sp>
@@ -37804,6 +38490,7 @@
           <a:lstStyle/>
           <a:p>
             <a:pPr algn="ctr"/>
+            <a:endParaRPr/>
           </a:p>
         </p:txBody>
       </p:sp>
@@ -37847,6 +38534,7 @@
           <a:lstStyle/>
           <a:p>
             <a:pPr algn="ctr"/>
+            <a:endParaRPr/>
           </a:p>
         </p:txBody>
       </p:sp>
@@ -37924,6 +38612,7 @@
           <a:lstStyle/>
           <a:p>
             <a:pPr algn="ctr"/>
+            <a:endParaRPr/>
           </a:p>
         </p:txBody>
       </p:sp>
@@ -38001,6 +38690,7 @@
           <a:lstStyle/>
           <a:p>
             <a:pPr algn="ctr"/>
+            <a:endParaRPr/>
           </a:p>
         </p:txBody>
       </p:sp>
@@ -38044,6 +38734,7 @@
           <a:lstStyle/>
           <a:p>
             <a:pPr algn="ctr"/>
+            <a:endParaRPr/>
           </a:p>
         </p:txBody>
       </p:sp>
@@ -38121,6 +38812,7 @@
           <a:lstStyle/>
           <a:p>
             <a:pPr algn="ctr"/>
+            <a:endParaRPr/>
           </a:p>
         </p:txBody>
       </p:sp>
@@ -38164,6 +38856,7 @@
           <a:lstStyle/>
           <a:p>
             <a:pPr algn="ctr"/>
+            <a:endParaRPr/>
           </a:p>
         </p:txBody>
       </p:sp>
@@ -38241,6 +38934,7 @@
           <a:lstStyle/>
           <a:p>
             <a:pPr algn="ctr"/>
+            <a:endParaRPr/>
           </a:p>
         </p:txBody>
       </p:sp>
@@ -38284,6 +38978,7 @@
           <a:lstStyle/>
           <a:p>
             <a:pPr algn="ctr"/>
+            <a:endParaRPr/>
           </a:p>
         </p:txBody>
       </p:sp>
@@ -38361,6 +39056,7 @@
           <a:lstStyle/>
           <a:p>
             <a:pPr algn="ctr"/>
+            <a:endParaRPr/>
           </a:p>
         </p:txBody>
       </p:sp>
@@ -38404,6 +39100,7 @@
           <a:lstStyle/>
           <a:p>
             <a:pPr algn="ctr"/>
+            <a:endParaRPr/>
           </a:p>
         </p:txBody>
       </p:sp>
@@ -38515,6 +39212,7 @@
           <a:lstStyle/>
           <a:p>
             <a:pPr algn="ctr"/>
+            <a:endParaRPr/>
           </a:p>
         </p:txBody>
       </p:sp>
@@ -38626,6 +39324,7 @@
           <a:lstStyle/>
           <a:p>
             <a:pPr algn="ctr"/>
+            <a:endParaRPr/>
           </a:p>
         </p:txBody>
       </p:sp>
@@ -38737,6 +39436,7 @@
           <a:lstStyle/>
           <a:p>
             <a:pPr algn="ctr"/>
+            <a:endParaRPr/>
           </a:p>
         </p:txBody>
       </p:sp>
@@ -38848,6 +39548,7 @@
           <a:lstStyle/>
           <a:p>
             <a:pPr algn="ctr"/>
+            <a:endParaRPr/>
           </a:p>
         </p:txBody>
       </p:sp>
@@ -38959,6 +39660,7 @@
           <a:lstStyle/>
           <a:p>
             <a:pPr algn="ctr"/>
+            <a:endParaRPr/>
           </a:p>
         </p:txBody>
       </p:sp>
@@ -39072,6 +39774,7 @@
           <a:lstStyle/>
           <a:p>
             <a:pPr algn="ctr"/>
+            <a:endParaRPr/>
           </a:p>
         </p:txBody>
       </p:sp>
@@ -39115,6 +39818,7 @@
           <a:lstStyle/>
           <a:p>
             <a:pPr algn="ctr"/>
+            <a:endParaRPr/>
           </a:p>
         </p:txBody>
       </p:sp>
@@ -39230,6 +39934,7 @@
           <a:lstStyle/>
           <a:p>
             <a:pPr algn="ctr"/>
+            <a:endParaRPr/>
           </a:p>
         </p:txBody>
       </p:sp>
@@ -39273,6 +39978,7 @@
           <a:lstStyle/>
           <a:p>
             <a:pPr algn="ctr"/>
+            <a:endParaRPr/>
           </a:p>
         </p:txBody>
       </p:sp>
@@ -39387,6 +40093,7 @@
           <a:lstStyle/>
           <a:p>
             <a:pPr algn="ctr"/>
+            <a:endParaRPr/>
           </a:p>
         </p:txBody>
       </p:sp>
@@ -39430,6 +40137,7 @@
           <a:lstStyle/>
           <a:p>
             <a:pPr algn="ctr"/>
+            <a:endParaRPr/>
           </a:p>
         </p:txBody>
       </p:sp>
@@ -39544,6 +40252,7 @@
           <a:lstStyle/>
           <a:p>
             <a:pPr algn="ctr"/>
+            <a:endParaRPr/>
           </a:p>
         </p:txBody>
       </p:sp>
@@ -39587,6 +40296,7 @@
           <a:lstStyle/>
           <a:p>
             <a:pPr algn="ctr"/>
+            <a:endParaRPr/>
           </a:p>
         </p:txBody>
       </p:sp>
@@ -39702,7 +40412,7 @@
 </file>
 
 <file path=ppt/slides/slide8.xml><?xml version="1.0" encoding="utf-8"?>
-<p:sld xmlns:a="http://schemas.openxmlformats.org/drawingml/2006/main" xmlns:p="http://schemas.openxmlformats.org/presentationml/2006/main" xmlns:r="http://schemas.openxmlformats.org/officeDocument/2006/relationships">
+<p:sld xmlns:a="http://schemas.openxmlformats.org/drawingml/2006/main" xmlns:r="http://schemas.openxmlformats.org/officeDocument/2006/relationships" xmlns:p="http://schemas.openxmlformats.org/presentationml/2006/main">
   <p:cSld>
     <p:bg>
       <p:bgPr>
@@ -39718,7 +40428,14 @@
         <p:cNvGrpSpPr/>
         <p:nvPr/>
       </p:nvGrpSpPr>
-      <p:grpSpPr/>
+      <p:grpSpPr>
+        <a:xfrm>
+          <a:off x="0" y="0"/>
+          <a:ext cx="0" cy="0"/>
+          <a:chOff x="0" y="0"/>
+          <a:chExt cx="0" cy="0"/>
+        </a:xfrm>
+      </p:grpSpPr>
       <p:sp>
         <p:nvSpPr>
           <p:cNvPr id="2" name="Rectangle 1"/>
@@ -39759,6 +40476,7 @@
           <a:lstStyle/>
           <a:p>
             <a:pPr algn="ctr"/>
+            <a:endParaRPr/>
           </a:p>
         </p:txBody>
       </p:sp>
@@ -39802,6 +40520,7 @@
           <a:lstStyle/>
           <a:p>
             <a:pPr algn="ctr"/>
+            <a:endParaRPr/>
           </a:p>
         </p:txBody>
       </p:sp>
@@ -39947,6 +40666,7 @@
           <a:lstStyle/>
           <a:p>
             <a:pPr algn="ctr"/>
+            <a:endParaRPr/>
           </a:p>
         </p:txBody>
       </p:sp>
@@ -40026,6 +40746,7 @@
           <a:lstStyle/>
           <a:p>
             <a:pPr algn="ctr"/>
+            <a:endParaRPr/>
           </a:p>
         </p:txBody>
       </p:sp>
@@ -40069,6 +40790,7 @@
           <a:lstStyle/>
           <a:p>
             <a:pPr algn="ctr"/>
+            <a:endParaRPr/>
           </a:p>
         </p:txBody>
       </p:sp>
@@ -40112,6 +40834,7 @@
           <a:lstStyle/>
           <a:p>
             <a:pPr algn="ctr"/>
+            <a:endParaRPr/>
           </a:p>
         </p:txBody>
       </p:sp>
@@ -40257,6 +40980,7 @@
           <a:lstStyle/>
           <a:p>
             <a:pPr algn="ctr"/>
+            <a:endParaRPr/>
           </a:p>
         </p:txBody>
       </p:sp>
@@ -40374,6 +41098,7 @@
           <a:lstStyle/>
           <a:p>
             <a:pPr algn="ctr"/>
+            <a:endParaRPr/>
           </a:p>
         </p:txBody>
       </p:sp>
@@ -40417,6 +41142,7 @@
           <a:lstStyle/>
           <a:p>
             <a:pPr algn="ctr"/>
+            <a:endParaRPr/>
           </a:p>
         </p:txBody>
       </p:sp>
@@ -40460,6 +41186,7 @@
           <a:lstStyle/>
           <a:p>
             <a:pPr algn="ctr"/>
+            <a:endParaRPr/>
           </a:p>
         </p:txBody>
       </p:sp>
@@ -40605,6 +41332,7 @@
           <a:lstStyle/>
           <a:p>
             <a:pPr algn="ctr"/>
+            <a:endParaRPr/>
           </a:p>
         </p:txBody>
       </p:sp>
@@ -40722,6 +41450,7 @@
           <a:lstStyle/>
           <a:p>
             <a:pPr algn="ctr"/>
+            <a:endParaRPr/>
           </a:p>
         </p:txBody>
       </p:sp>
@@ -40765,6 +41494,7 @@
           <a:lstStyle/>
           <a:p>
             <a:pPr algn="ctr"/>
+            <a:endParaRPr/>
           </a:p>
         </p:txBody>
       </p:sp>
@@ -40808,6 +41538,7 @@
           <a:lstStyle/>
           <a:p>
             <a:pPr algn="ctr"/>
+            <a:endParaRPr/>
           </a:p>
         </p:txBody>
       </p:sp>
@@ -40953,6 +41684,7 @@
           <a:lstStyle/>
           <a:p>
             <a:pPr algn="ctr"/>
+            <a:endParaRPr/>
           </a:p>
         </p:txBody>
       </p:sp>
@@ -41070,6 +41802,7 @@
           <a:lstStyle/>
           <a:p>
             <a:pPr algn="ctr"/>
+            <a:endParaRPr/>
           </a:p>
         </p:txBody>
       </p:sp>
@@ -41113,6 +41846,7 @@
           <a:lstStyle/>
           <a:p>
             <a:pPr algn="ctr"/>
+            <a:endParaRPr/>
           </a:p>
         </p:txBody>
       </p:sp>
@@ -41156,6 +41890,7 @@
           <a:lstStyle/>
           <a:p>
             <a:pPr algn="ctr"/>
+            <a:endParaRPr/>
           </a:p>
         </p:txBody>
       </p:sp>
@@ -41301,6 +42036,7 @@
           <a:lstStyle/>
           <a:p>
             <a:pPr algn="ctr"/>
+            <a:endParaRPr/>
           </a:p>
         </p:txBody>
       </p:sp>
@@ -41418,6 +42154,7 @@
           <a:lstStyle/>
           <a:p>
             <a:pPr algn="ctr"/>
+            <a:endParaRPr/>
           </a:p>
         </p:txBody>
       </p:sp>
@@ -41461,6 +42198,7 @@
           <a:lstStyle/>
           <a:p>
             <a:pPr algn="ctr"/>
+            <a:endParaRPr/>
           </a:p>
         </p:txBody>
       </p:sp>
@@ -41507,7 +42245,7 @@
 </file>
 
 <file path=ppt/slides/slide9.xml><?xml version="1.0" encoding="utf-8"?>
-<p:sld xmlns:a="http://schemas.openxmlformats.org/drawingml/2006/main" xmlns:p="http://schemas.openxmlformats.org/presentationml/2006/main" xmlns:r="http://schemas.openxmlformats.org/officeDocument/2006/relationships">
+<p:sld xmlns:a="http://schemas.openxmlformats.org/drawingml/2006/main" xmlns:r="http://schemas.openxmlformats.org/officeDocument/2006/relationships" xmlns:p="http://schemas.openxmlformats.org/presentationml/2006/main">
   <p:cSld>
     <p:bg>
       <p:bgPr>
@@ -41523,7 +42261,14 @@
         <p:cNvGrpSpPr/>
         <p:nvPr/>
       </p:nvGrpSpPr>
-      <p:grpSpPr/>
+      <p:grpSpPr>
+        <a:xfrm>
+          <a:off x="0" y="0"/>
+          <a:ext cx="0" cy="0"/>
+          <a:chOff x="0" y="0"/>
+          <a:chExt cx="0" cy="0"/>
+        </a:xfrm>
+      </p:grpSpPr>
       <p:sp>
         <p:nvSpPr>
           <p:cNvPr id="2" name="Rectangle 1"/>
@@ -41564,6 +42309,7 @@
           <a:lstStyle/>
           <a:p>
             <a:pPr algn="ctr"/>
+            <a:endParaRPr/>
           </a:p>
         </p:txBody>
       </p:sp>
@@ -41607,6 +42353,7 @@
           <a:lstStyle/>
           <a:p>
             <a:pPr algn="ctr"/>
+            <a:endParaRPr/>
           </a:p>
         </p:txBody>
       </p:sp>
@@ -41752,6 +42499,7 @@
           <a:lstStyle/>
           <a:p>
             <a:pPr algn="ctr"/>
+            <a:endParaRPr/>
           </a:p>
         </p:txBody>
       </p:sp>
@@ -41831,6 +42579,7 @@
           <a:lstStyle/>
           <a:p>
             <a:pPr algn="ctr"/>
+            <a:endParaRPr/>
           </a:p>
         </p:txBody>
       </p:sp>
@@ -41874,6 +42623,7 @@
           <a:lstStyle/>
           <a:p>
             <a:pPr algn="ctr"/>
+            <a:endParaRPr/>
           </a:p>
         </p:txBody>
       </p:sp>
@@ -41917,6 +42667,7 @@
           <a:lstStyle/>
           <a:p>
             <a:pPr algn="ctr"/>
+            <a:endParaRPr/>
           </a:p>
         </p:txBody>
       </p:sp>
@@ -42032,6 +42783,7 @@
           <a:lstStyle/>
           <a:p>
             <a:pPr algn="ctr"/>
+            <a:endParaRPr/>
           </a:p>
         </p:txBody>
       </p:sp>
@@ -42213,6 +42965,7 @@
           <a:lstStyle/>
           <a:p>
             <a:pPr algn="ctr"/>
+            <a:endParaRPr/>
           </a:p>
         </p:txBody>
       </p:sp>
@@ -42256,6 +43009,7 @@
           <a:lstStyle/>
           <a:p>
             <a:pPr algn="ctr"/>
+            <a:endParaRPr/>
           </a:p>
         </p:txBody>
       </p:sp>
@@ -42333,6 +43087,7 @@
           <a:lstStyle/>
           <a:p>
             <a:pPr algn="ctr"/>
+            <a:endParaRPr/>
           </a:p>
         </p:txBody>
       </p:sp>
@@ -42415,6 +43170,7 @@
           <a:lstStyle/>
           <a:p>
             <a:pPr algn="ctr"/>
+            <a:endParaRPr/>
           </a:p>
         </p:txBody>
       </p:sp>
@@ -42494,6 +43250,7 @@
           <a:lstStyle/>
           <a:p>
             <a:pPr algn="ctr"/>
+            <a:endParaRPr/>
           </a:p>
         </p:txBody>
       </p:sp>
@@ -42537,6 +43294,7 @@
           <a:lstStyle/>
           <a:p>
             <a:pPr algn="ctr"/>
+            <a:endParaRPr/>
           </a:p>
         </p:txBody>
       </p:sp>
@@ -42614,6 +43372,7 @@
           <a:lstStyle/>
           <a:p>
             <a:pPr algn="ctr"/>
+            <a:endParaRPr/>
           </a:p>
         </p:txBody>
       </p:sp>
@@ -42696,6 +43455,7 @@
           <a:lstStyle/>
           <a:p>
             <a:pPr algn="ctr"/>
+            <a:endParaRPr/>
           </a:p>
         </p:txBody>
       </p:sp>
@@ -42775,6 +43535,7 @@
           <a:lstStyle/>
           <a:p>
             <a:pPr algn="ctr"/>
+            <a:endParaRPr/>
           </a:p>
         </p:txBody>
       </p:sp>
@@ -42818,6 +43579,7 @@
           <a:lstStyle/>
           <a:p>
             <a:pPr algn="ctr"/>
+            <a:endParaRPr/>
           </a:p>
         </p:txBody>
       </p:sp>
@@ -42895,6 +43657,7 @@
           <a:lstStyle/>
           <a:p>
             <a:pPr algn="ctr"/>
+            <a:endParaRPr/>
           </a:p>
         </p:txBody>
       </p:sp>
@@ -42977,6 +43740,7 @@
           <a:lstStyle/>
           <a:p>
             <a:pPr algn="ctr"/>
+            <a:endParaRPr/>
           </a:p>
         </p:txBody>
       </p:sp>
